--- a/lecons/F2T/02_F2T_L1_P2_Equatorial_Soils_Vegetation.pptx
+++ b/lecons/F2T/02_F2T_L1_P2_Equatorial_Soils_Vegetation.pptx
@@ -57,10 +57,9 @@
     <p:sldId id="305" r:id="rId51"/>
     <p:sldId id="306" r:id="rId52"/>
     <p:sldId id="307" r:id="rId53"/>
-    <p:sldId id="308" r:id="rId54"/>
   </p:sldIdLst>
   <p:notesMasterIdLst>
-    <p:notesMasterId r:id="rId55"/>
+    <p:notesMasterId r:id="rId54"/>
   </p:notesMasterIdLst>
   <p:sldSz cx="12192000" cy="6858000"/>
   <p:notesSz cx="6858000" cy="12192000"/>
@@ -642,7 +641,7 @@
           <a:p>
             <a:r>
               <a:rPr lang="en-US" dirty="0"/>
-              <a:t>Listen carefully to this situation from real life. Jean visits a village near Ebolowa. The forest is so thick that little light reaches the ground. The farmers tell him that the soil is good for a few years after clearing the forest, and then the crops become poor. Think about it, because I am going to ask you some questions.</a:t>
+              <a:t>Listen carefully to this situation from real life. Jean visits a village near Ebolowa. The forest is so thick that little light reaches the ground. The farmers say that the soil is good for a few years after clearing, and then the crops become poor. Jean asks: "Why is the forest so rich, but the soil so poor?" Think about it, because I am going to ask you some questions.</a:t>
             </a:r>
             <a:endParaRPr lang="en-US" dirty="0"/>
           </a:p>
@@ -818,7 +817,7 @@
           <a:p>
             <a:r>
               <a:rPr lang="en-US" dirty="0"/>
-              <a:t>Good. The crops become poor a few years after the forest is cleared.</a:t>
+              <a:t>Good. Jean does not understand why a rich forest grows on a soil that quickly becomes poor.</a:t>
             </a:r>
             <a:endParaRPr lang="en-US" dirty="0"/>
           </a:p>
@@ -906,7 +905,7 @@
           <a:p>
             <a:r>
               <a:rPr lang="en-US" dirty="0"/>
-              <a:t>Question 2: Why does little light reach the ground? Think for a moment, then raise your hand to answer.</a:t>
+              <a:t>Question 2: Describe the forest. Think for a moment, then raise your hand to answer.</a:t>
             </a:r>
             <a:endParaRPr lang="en-US" dirty="0"/>
           </a:p>
@@ -994,7 +993,7 @@
           <a:p>
             <a:r>
               <a:rPr lang="en-US" dirty="0"/>
-              <a:t>Good. The tall trees and their leaves cover the forest like a roof.</a:t>
+              <a:t>Good. It is very thick, and little light reaches the ground.</a:t>
             </a:r>
             <a:endParaRPr lang="en-US" dirty="0"/>
           </a:p>
@@ -1082,7 +1081,7 @@
           <a:p>
             <a:r>
               <a:rPr lang="en-US" dirty="0"/>
-              <a:t>Question 3: Why does the soil become poor? Think for a moment, then raise your hand to answer.</a:t>
+              <a:t>Question 3: What happens to the soil after clearing? Think for a moment, then raise your hand to answer.</a:t>
             </a:r>
             <a:endParaRPr lang="en-US" dirty="0"/>
           </a:p>
@@ -1170,7 +1169,7 @@
           <a:p>
             <a:r>
               <a:rPr lang="en-US" dirty="0"/>
-              <a:t>Good. Heavy rain washes the plant food out of the soil when the forest is cleared.</a:t>
+              <a:t>Good. It becomes poor after a few years.</a:t>
             </a:r>
             <a:endParaRPr lang="en-US" dirty="0"/>
           </a:p>
@@ -1434,7 +1433,7 @@
           <a:p>
             <a:r>
               <a:rPr lang="en-US" dirty="0"/>
-              <a:t>Activity 1. Look carefully at this picture: the equatorial forest is green all year. Observe every detail before I ask the question.</a:t>
+              <a:t>Activity 1. Look carefully at this picture: the equatorial forest. Observe every detail before I ask the question.</a:t>
             </a:r>
             <a:endParaRPr lang="en-US" dirty="0"/>
           </a:p>
@@ -1610,7 +1609,7 @@
           <a:p>
             <a:r>
               <a:rPr lang="en-US" dirty="0"/>
-              <a:t>Here is the question for Activity 1: The trees of this forest are green all year. Why? Take one minute to think and write your answer in your rough notebook.</a:t>
+              <a:t>Here is the question for Activity 1: Why are the trees of this forest green all year? Take one minute to think and write your answer in your rough notebook.</a:t>
             </a:r>
             <a:endParaRPr lang="en-US" dirty="0"/>
           </a:p>
@@ -1698,7 +1697,7 @@
           <a:p>
             <a:r>
               <a:rPr lang="en-US" dirty="0"/>
-              <a:t>Let us check the answer together. It is hot and wet all year, so the trees never need to lose all their leaves: the forest is evergreen.</a:t>
+              <a:t>Let us check the answer together. It is hot and wet all year: the forest is evergreen.</a:t>
             </a:r>
             <a:endParaRPr lang="en-US" dirty="0"/>
           </a:p>
@@ -1786,7 +1785,7 @@
           <a:p>
             <a:r>
               <a:rPr lang="en-US" dirty="0"/>
-              <a:t>Activity 2. Look carefully at this diagram: the layers of the equatorial forest. Observe every detail before I ask the question.</a:t>
+              <a:t>Activity 2. Look carefully at this diagram: the layers of the forest. Observe every detail before I ask the question.</a:t>
             </a:r>
             <a:endParaRPr lang="en-US" dirty="0"/>
           </a:p>
@@ -1874,7 +1873,7 @@
           <a:p>
             <a:r>
               <a:rPr lang="en-US" dirty="0"/>
-              <a:t>Here is the question for Activity 2: Name the layers of the forest from the top to the ground. Take one minute to think and write your answer in your rough notebook.</a:t>
+              <a:t>Here is the question for Activity 2: What is the name of the tallest layer of trees? Take one minute to think and write your answer in your rough notebook.</a:t>
             </a:r>
             <a:endParaRPr lang="en-US" dirty="0"/>
           </a:p>
@@ -1962,7 +1961,7 @@
           <a:p>
             <a:r>
               <a:rPr lang="en-US" dirty="0"/>
-              <a:t>Let us check the answer together. The emergents, the canopy, the under-canopy, the shrub layer and the forest floor.</a:t>
+              <a:t>Let us check the answer together. The emergents.</a:t>
             </a:r>
             <a:endParaRPr lang="en-US" dirty="0"/>
           </a:p>
@@ -2050,7 +2049,7 @@
           <a:p>
             <a:r>
               <a:rPr lang="en-US" dirty="0"/>
-              <a:t>Activity 3. Look carefully at this picture: a mangrove forest along a coast. Observe every detail before I ask the question.</a:t>
+              <a:t>Activity 3. Look carefully at this picture: mangroves. Observe every detail before I ask the question.</a:t>
             </a:r>
             <a:endParaRPr lang="en-US" dirty="0"/>
           </a:p>
@@ -2138,7 +2137,7 @@
           <a:p>
             <a:r>
               <a:rPr lang="en-US" dirty="0"/>
-              <a:t>Here is the question for Activity 3: Where do mangroves grow in Cameroon? What is special about them? Take one minute to think and write your answer in your rough notebook.</a:t>
+              <a:t>Here is the question for Activity 3: Where do mangroves grow in Cameroon? Take one minute to think and write your answer in your rough notebook.</a:t>
             </a:r>
             <a:endParaRPr lang="en-US" dirty="0"/>
           </a:p>
@@ -2226,7 +2225,7 @@
           <a:p>
             <a:r>
               <a:rPr lang="en-US" dirty="0"/>
-              <a:t>Let us check the answer together. They grow along the coast near Douala and Limbe, in salty water, on long roots above the mud.</a:t>
+              <a:t>Let us check the answer together. Along the coast, near Douala and Limbe, in salty water.</a:t>
             </a:r>
             <a:endParaRPr lang="en-US" dirty="0"/>
           </a:p>
@@ -2402,7 +2401,7 @@
           <a:p>
             <a:r>
               <a:rPr lang="en-US" dirty="0"/>
-              <a:t>Here is the question for Activity 4: What is the colour of the soils of the forest region? What gives them this colour? Take one minute to think and write your answer in your rough notebook.</a:t>
+              <a:t>Here is the question for Activity 4: What gives the soils of the forest region their red colour? Take one minute to think and write your answer in your rough notebook.</a:t>
             </a:r>
             <a:endParaRPr lang="en-US" dirty="0"/>
           </a:p>
@@ -2578,7 +2577,7 @@
           <a:p>
             <a:r>
               <a:rPr lang="en-US" dirty="0"/>
-              <a:t>Let us check the answer together. They are red or yellow ferrallitic soils. Iron in the soil gives the red colour.</a:t>
+              <a:t>Let us check the answer together. The iron in the soil.</a:t>
             </a:r>
             <a:endParaRPr lang="en-US" dirty="0"/>
           </a:p>
@@ -2666,7 +2665,7 @@
           <a:p>
             <a:r>
               <a:rPr lang="en-US" dirty="0"/>
-              <a:t>Activity 5. Look carefully at this picture: hard laterite used to make bricks. Observe every detail before I ask the question.</a:t>
+              <a:t>Activity 5. Look carefully at this picture: a hard, red soil. Observe every detail before I ask the question.</a:t>
             </a:r>
             <a:endParaRPr lang="en-US" dirty="0"/>
           </a:p>
@@ -2754,7 +2753,7 @@
           <a:p>
             <a:r>
               <a:rPr lang="en-US" dirty="0"/>
-              <a:t>Here is the question for Activity 5: Heavy rain washes plant food deep into the soil. What is this called, and what happens to the soil? Take one minute to think and write your answer in your rough notebook.</a:t>
+              <a:t>Here is the question for Activity 5: What do we call the washing of plant food deep into the soil by heavy rain? Take one minute to think and write your answer in your rough notebook.</a:t>
             </a:r>
             <a:endParaRPr lang="en-US" dirty="0"/>
           </a:p>
@@ -2842,7 +2841,7 @@
           <a:p>
             <a:r>
               <a:rPr lang="en-US" dirty="0"/>
-              <a:t>Let us check the answer together. It is leaching. The top soil becomes poor, and a hard layer of laterite can form.</a:t>
+              <a:t>Let us check the answer together. Leaching.</a:t>
             </a:r>
             <a:endParaRPr lang="en-US" dirty="0"/>
           </a:p>
@@ -3106,7 +3105,7 @@
           <a:p>
             <a:r>
               <a:rPr lang="en-US" dirty="0"/>
-              <a:t>Let us copy Vegetation. The equatorial forest has the following characteristics. On this slide we have Evergreen forest. Write each point on a new line, with the key term first, and explain it in your own words when we revise. When you finish, we go to the next slide.</a:t>
+              <a:t>Let us copy Vegetation. The equatorial forest has the following characteristics. Copy the point on Evergreen on the left, then draw the diagram on the right: the equatorial forest. Give it a title and label it clearly.</a:t>
             </a:r>
             <a:endParaRPr lang="en-US" dirty="0"/>
           </a:p>
@@ -3194,7 +3193,7 @@
           <a:p>
             <a:r>
               <a:rPr lang="en-US" dirty="0"/>
-              <a:t>We continue with Vegetation. On this slide we have Layers and Hardwood trees. Write each point on a new line, with the key term first, and explain it in your own words when we revise. When you finish, we go to the next slide.</a:t>
+              <a:t>Copy the point on Layers on the left, then draw the diagram on the right: the layers of the forest. Give it a title and label it clearly.</a:t>
             </a:r>
             <a:endParaRPr lang="en-US" dirty="0"/>
           </a:p>
@@ -3282,7 +3281,7 @@
           <a:p>
             <a:r>
               <a:rPr lang="en-US" dirty="0"/>
-              <a:t>We continue with Vegetation. On this slide we have Climbers and Mangroves. Write each point on a new line, with the key term first, and explain it in your own words when we revise.</a:t>
+              <a:t>We continue with Vegetation. On this slide we have Hardwoods, Climbers and Mangroves. Write each point on a new line, with the key term first, and explain it in your own words when we revise.</a:t>
             </a:r>
             <a:endParaRPr lang="en-US" dirty="0"/>
           </a:p>
@@ -3370,7 +3369,7 @@
           <a:p>
             <a:r>
               <a:rPr lang="en-US" dirty="0"/>
-              <a:t>Now draw this illustration in your notebook: the layers of the equatorial forest. Give it a title and label it clearly.</a:t>
+              <a:t>Let us copy Soils. The soils have the following characteristics. Copy the point on Ferrallitic soils on the left, then draw the diagram on the right: a red soil. Give it a title and label it clearly.</a:t>
             </a:r>
             <a:endParaRPr lang="en-US" dirty="0"/>
           </a:p>
@@ -3546,7 +3545,7 @@
           <a:p>
             <a:r>
               <a:rPr lang="en-US" dirty="0"/>
-              <a:t>Let us copy Soils. The soils of the Equatorial region have the following characteristics. On this slide we have Ferrallitic soils and Leached soils. Write each point on a new line, with the key term first, and explain it in your own words when we revise. When you finish, we go to the next slide.</a:t>
+              <a:t>We continue with Soils. On this slide we have Leached, Thin humus and Poor after clearing. Write each point on a new line, with the key term first, and explain it in your own words when we revise.</a:t>
             </a:r>
             <a:endParaRPr lang="en-US" dirty="0"/>
           </a:p>
@@ -3634,7 +3633,7 @@
           <a:p>
             <a:r>
               <a:rPr lang="en-US" dirty="0"/>
-              <a:t>We continue with Soils. On this slide we have Thin humus and Poor after clearing. Write each point on a new line, with the key term first, and explain it in your own words when we revise.</a:t>
+              <a:t>Now let us check what you have understood. Question 1: Give two characteristics of the equatorial forest. Answer in your exercise book.</a:t>
             </a:r>
             <a:endParaRPr lang="en-US" dirty="0"/>
           </a:p>
@@ -3722,7 +3721,7 @@
           <a:p>
             <a:r>
               <a:rPr lang="en-US" dirty="0"/>
-              <a:t>Now let us check what you have understood. Question 1: Give two characteristics of the equatorial forest. Answer in your exercise book.</a:t>
+              <a:t>The expected answer is: it is evergreen and it has several layers of tall trees (also hardwoods, climbers). If you got it right, well done.</a:t>
             </a:r>
             <a:endParaRPr lang="en-US" dirty="0"/>
           </a:p>
@@ -3810,7 +3809,7 @@
           <a:p>
             <a:r>
               <a:rPr lang="en-US" dirty="0"/>
-              <a:t>The expected answer is: it is evergreen and it has several layers of tall trees (also hardwoods, climbers). If you got it right, well done.</a:t>
+              <a:t>Now let us check what you have understood. Question 2: Why are equatorial soils poor when the forest is cleared? Answer in your exercise book.</a:t>
             </a:r>
             <a:endParaRPr lang="en-US" dirty="0"/>
           </a:p>
@@ -3898,7 +3897,7 @@
           <a:p>
             <a:r>
               <a:rPr lang="en-US" dirty="0"/>
-              <a:t>Now let us check what you have understood. Question 2: Why are equatorial soils poor when the forest is cleared? Answer in your exercise book.</a:t>
+              <a:t>The expected answer is: heavy rain washes the plant food out of the soil (leaching) and the thin humus is quickly used up. If you got it right, well done.</a:t>
             </a:r>
             <a:endParaRPr lang="en-US" dirty="0"/>
           </a:p>
@@ -3986,7 +3985,7 @@
           <a:p>
             <a:r>
               <a:rPr lang="en-US" dirty="0"/>
-              <a:t>The expected answer is: heavy rain washes the plant food out of the soil (leaching) and the thin humus is quickly used up. If you got it right, well done.</a:t>
+              <a:t>For those who need more practice, fill in the blanks in your exercise book. The answers are: number 1, evergreen; number 2, canopy; number 3, leaching.</a:t>
             </a:r>
             <a:endParaRPr lang="en-US" dirty="0"/>
           </a:p>
@@ -4074,7 +4073,7 @@
           <a:p>
             <a:r>
               <a:rPr lang="en-US" dirty="0"/>
-              <a:t>For those who need more practice, fill in the blanks in your exercise book. The answers are: number 1, evergreen; number 2, canopy; number 3, leaching.</a:t>
+              <a:t>For your homework: List three products from the forest of southern Cameroon that are sold in the market of Garoua (for example timber, plantains or cocoa products). We shall correct it at the beginning of our next lesson.</a:t>
             </a:r>
             <a:endParaRPr lang="en-US" dirty="0"/>
           </a:p>
@@ -4162,7 +4161,7 @@
           <a:p>
             <a:r>
               <a:rPr lang="en-US" dirty="0"/>
-              <a:t>For your homework: List three products from the forest of southern Cameroon that are sold in the market of Garoua (for example timber, plantains or cocoa products). We shall correct it at the beginning of our next lesson.</a:t>
+              <a:t>Our next lesson will be on Lesson 1 (Part 3): The Equatorial Region: Types of Resources and Methods of Exploitation. Thank you for your attention, and see you next time.</a:t>
             </a:r>
             <a:endParaRPr lang="en-US" dirty="0"/>
           </a:p>
@@ -4250,7 +4249,7 @@
           <a:p>
             <a:r>
               <a:rPr lang="en-US" dirty="0"/>
-              <a:t>Our next lesson will be on Lesson 1 (Part 3): The Equatorial Region: Types of Resources and Methods of Exploitation. Thank you for your attention, and see you next time.</a:t>
+              <a:t>Let us play the bilingual game. I say a word in English, and you give me the French word. Then we do the reverse.</a:t>
             </a:r>
             <a:endParaRPr lang="en-US" dirty="0"/>
           </a:p>
@@ -4338,7 +4337,7 @@
           <a:p>
             <a:r>
               <a:rPr lang="en-US" dirty="0"/>
-              <a:t>Let us play the bilingual game. I say a word in English, and you give me the French word. Then we do the reverse.</a:t>
+              <a:t>I record this information in the official logbook of the class after the lesson.</a:t>
             </a:r>
             <a:endParaRPr lang="en-US" dirty="0"/>
           </a:p>
@@ -4514,7 +4513,7 @@
           <a:p>
             <a:r>
               <a:rPr lang="en-US" dirty="0"/>
-              <a:t>I record this information in the official logbook of the class after the lesson.</a:t>
+              <a:t>I complete the second page of the logbook: the matter taught, the evaluation, the homework and the attendance.</a:t>
             </a:r>
             <a:endParaRPr lang="en-US" dirty="0"/>
           </a:p>
@@ -4602,7 +4601,7 @@
           <a:p>
             <a:r>
               <a:rPr lang="en-US" dirty="0"/>
-              <a:t>I complete the second page of the logbook: the matter taught, the evaluation, the homework and the attendance.</a:t>
+              <a:t>This slide is for me, the teacher: it gives the timing of the lesson and what to do if the projector is not available.</a:t>
             </a:r>
             <a:endParaRPr lang="en-US" dirty="0"/>
           </a:p>
@@ -4690,7 +4689,7 @@
           <a:p>
             <a:r>
               <a:rPr lang="en-US" dirty="0"/>
-              <a:t>This slide is for me, the teacher: it gives the timing of the lesson and what to do if the projector is not available.</a:t>
+              <a:t>These are the references and picture credits used to prepare this lesson.</a:t>
             </a:r>
             <a:endParaRPr lang="en-US" dirty="0"/>
           </a:p>
@@ -4714,94 +4713,6 @@
             <a:fld id="{F7021451-1387-4CA6-816F-3879F97B5CBC}" type="slidenum">
               <a:rPr lang="en-US"/>
               <a:t>52</a:t>
-            </a:fld>
-            <a:endParaRPr lang="en-US"/>
-          </a:p>
-        </p:txBody>
-      </p:sp>
-    </p:spTree>
-    <p:extLst>
-      <p:ext uri="{BB962C8B-B14F-4D97-AF65-F5344CB8AC3E}">
-        <p14:creationId xmlns:p14="http://schemas.microsoft.com/office/powerpoint/2010/main" val="1024086991"/>
-      </p:ext>
-    </p:extLst>
-  </p:cSld>
-  <p:clrMapOvr>
-    <a:masterClrMapping/>
-  </p:clrMapOvr>
-</p:notes>
-</file>
-
-<file path=ppt/notesSlides/notesSlide53.xml><?xml version="1.0" encoding="utf-8"?>
-<p:notes xmlns:a="http://schemas.openxmlformats.org/drawingml/2006/main" xmlns:r="http://schemas.openxmlformats.org/officeDocument/2006/relationships" xmlns:p="http://schemas.openxmlformats.org/presentationml/2006/main">
-  <p:cSld>
-    <p:spTree>
-      <p:nvGrpSpPr>
-        <p:cNvPr id="1" name=""/>
-        <p:cNvGrpSpPr/>
-        <p:nvPr/>
-      </p:nvGrpSpPr>
-      <p:grpSpPr>
-        <a:xfrm>
-          <a:off x="0" y="0"/>
-          <a:ext cx="0" cy="0"/>
-          <a:chOff x="0" y="0"/>
-          <a:chExt cx="0" cy="0"/>
-        </a:xfrm>
-      </p:grpSpPr>
-      <p:sp>
-        <p:nvSpPr>
-          <p:cNvPr id="2" name="Slide Image Placeholder 1"/>
-          <p:cNvSpPr>
-            <a:spLocks noGrp="1" noRot="1" noChangeAspect="1"/>
-          </p:cNvSpPr>
-          <p:nvPr>
-            <p:ph type="sldImg"/>
-          </p:nvPr>
-        </p:nvSpPr>
-        <p:spPr/>
-      </p:sp>
-      <p:sp>
-        <p:nvSpPr>
-          <p:cNvPr id="3" name="Notes Placeholder 2"/>
-          <p:cNvSpPr>
-            <a:spLocks noGrp="1"/>
-          </p:cNvSpPr>
-          <p:nvPr>
-            <p:ph type="body" idx="1"/>
-          </p:nvPr>
-        </p:nvSpPr>
-        <p:spPr/>
-        <p:txBody>
-          <a:bodyPr/>
-          <a:lstStyle/>
-          <a:p>
-            <a:r>
-              <a:rPr lang="en-US" dirty="0"/>
-              <a:t>These are the references and picture credits used to prepare this lesson.</a:t>
-            </a:r>
-            <a:endParaRPr lang="en-US" dirty="0"/>
-          </a:p>
-        </p:txBody>
-      </p:sp>
-      <p:sp>
-        <p:nvSpPr>
-          <p:cNvPr id="4" name="Slide Number Placeholder 3"/>
-          <p:cNvSpPr>
-            <a:spLocks noGrp="1"/>
-          </p:cNvSpPr>
-          <p:nvPr>
-            <p:ph type="sldNum" sz="quarter" idx="10"/>
-          </p:nvPr>
-        </p:nvSpPr>
-        <p:spPr/>
-        <p:txBody>
-          <a:bodyPr/>
-          <a:lstStyle/>
-          <a:p>
-            <a:fld id="{F7021451-1387-4CA6-816F-3879F97B5CBC}" type="slidenum">
-              <a:rPr lang="en-US"/>
-              <a:t>53</a:t>
             </a:fld>
             <a:endParaRPr lang="en-US"/>
           </a:p>
@@ -6510,7 +6421,7 @@
         <p:spPr>
           <a:xfrm>
             <a:off x="0" y="658368"/>
-            <a:ext cx="3840480" cy="5833872"/>
+            <a:ext cx="2468880" cy="5833872"/>
           </a:xfrm>
           <a:prstGeom prst="rect">
             <a:avLst/>
@@ -6525,8 +6436,8 @@
         </p:nvSpPr>
         <p:spPr>
           <a:xfrm>
-            <a:off x="4069080" y="1005840"/>
-            <a:ext cx="7802575" cy="731520"/>
+            <a:off x="2697480" y="1005840"/>
+            <a:ext cx="9174175" cy="731520"/>
           </a:xfrm>
           <a:prstGeom prst="rect">
             <a:avLst/>
@@ -6566,8 +6477,8 @@
         </p:nvSpPr>
         <p:spPr>
           <a:xfrm>
-            <a:off x="4069080" y="1783080"/>
-            <a:ext cx="7802575" cy="4663440"/>
+            <a:off x="2697480" y="1783080"/>
+            <a:ext cx="9174175" cy="4663440"/>
           </a:xfrm>
           <a:prstGeom prst="rect">
             <a:avLst/>
@@ -6594,7 +6505,7 @@
                 <a:ea typeface="Times New Roman" pitchFamily="34" charset="-122"/>
                 <a:cs typeface="Times New Roman" pitchFamily="34" charset="-120"/>
               </a:rPr>
-              <a:t>Jean visits a village near Ebolowa. The forest is so thick that little light reaches the ground. The farmers tell him that the soil is good for a few years after clearing the forest, and then the crops become poor.</a:t>
+              <a:t>Jean visits a village near Ebolowa. The forest is so thick that little light reaches the ground. The farmers say that the soil is good for a few years after clearing, and then the crops become poor. Jean asks: "Why is the forest so rich, but the soil so poor?"</a:t>
             </a:r>
             <a:endParaRPr lang="en-US" sz="4000" dirty="0"/>
           </a:p>
@@ -7032,7 +6943,7 @@
                 <a:ea typeface="Times New Roman" pitchFamily="34" charset="-122"/>
                 <a:cs typeface="Times New Roman" pitchFamily="34" charset="-120"/>
               </a:rPr>
-              <a:t>The crops become poor a few years after the forest is cleared.</a:t>
+              <a:t>Jean does not understand why a rich forest grows on a soil that quickly becomes poor.</a:t>
             </a:r>
             <a:endParaRPr lang="en-US" sz="4000" dirty="0"/>
           </a:p>
@@ -7251,7 +7162,7 @@
                 <a:ea typeface="Times New Roman" pitchFamily="34" charset="-122"/>
                 <a:cs typeface="Times New Roman" pitchFamily="34" charset="-120"/>
               </a:rPr>
-              <a:t>Why does little light reach the ground?</a:t>
+              <a:t>Describe the forest.</a:t>
             </a:r>
             <a:endParaRPr lang="en-US" sz="4000" dirty="0"/>
           </a:p>
@@ -7470,7 +7381,7 @@
                 <a:ea typeface="Times New Roman" pitchFamily="34" charset="-122"/>
                 <a:cs typeface="Times New Roman" pitchFamily="34" charset="-120"/>
               </a:rPr>
-              <a:t>The tall trees and their leaves cover the forest like a roof.</a:t>
+              <a:t>It is very thick, and little light reaches the ground.</a:t>
             </a:r>
             <a:endParaRPr lang="en-US" sz="4000" dirty="0"/>
           </a:p>
@@ -7689,7 +7600,7 @@
                 <a:ea typeface="Times New Roman" pitchFamily="34" charset="-122"/>
                 <a:cs typeface="Times New Roman" pitchFamily="34" charset="-120"/>
               </a:rPr>
-              <a:t>Why does the soil become poor?</a:t>
+              <a:t>What happens to the soil after clearing?</a:t>
             </a:r>
             <a:endParaRPr lang="en-US" sz="4000" dirty="0"/>
           </a:p>
@@ -7908,7 +7819,7 @@
                 <a:ea typeface="Times New Roman" pitchFamily="34" charset="-122"/>
                 <a:cs typeface="Times New Roman" pitchFamily="34" charset="-120"/>
               </a:rPr>
-              <a:t>Heavy rain washes the plant food out of the soil when the forest is cleared.</a:t>
+              <a:t>It becomes poor after a few years.</a:t>
             </a:r>
             <a:endParaRPr lang="en-US" sz="4000" dirty="0"/>
           </a:p>
@@ -8560,7 +8471,7 @@
                 <a:ea typeface="Times New Roman" pitchFamily="34" charset="-122"/>
                 <a:cs typeface="Times New Roman" pitchFamily="34" charset="-120"/>
               </a:rPr>
-              <a:t>The equatorial forest is green all year.</a:t>
+              <a:t>The equatorial forest.</a:t>
             </a:r>
             <a:endParaRPr lang="en-US" sz="1800" dirty="0"/>
           </a:p>
@@ -9374,7 +9285,7 @@
                 <a:ea typeface="Times New Roman" pitchFamily="34" charset="-122"/>
                 <a:cs typeface="Times New Roman" pitchFamily="34" charset="-120"/>
               </a:rPr>
-              <a:t>The trees of this forest are green all year. Why?</a:t>
+              <a:t>Why are the trees of this forest green all year?</a:t>
             </a:r>
             <a:endParaRPr lang="en-US" sz="4000" dirty="0"/>
           </a:p>
@@ -9593,7 +9504,7 @@
                 <a:ea typeface="Times New Roman" pitchFamily="34" charset="-122"/>
                 <a:cs typeface="Times New Roman" pitchFamily="34" charset="-120"/>
               </a:rPr>
-              <a:t>It is hot and wet all year, so the trees never need to lose all their leaves: the forest is evergreen.</a:t>
+              <a:t>It is hot and wet all year: the forest is evergreen.</a:t>
             </a:r>
             <a:endParaRPr lang="en-US" sz="4000" dirty="0"/>
           </a:p>
@@ -9807,7 +9718,7 @@
                 <a:ea typeface="Times New Roman" pitchFamily="34" charset="-122"/>
                 <a:cs typeface="Times New Roman" pitchFamily="34" charset="-120"/>
               </a:rPr>
-              <a:t>The layers of the equatorial forest.</a:t>
+              <a:t>The layers of the forest.</a:t>
             </a:r>
             <a:endParaRPr lang="en-US" sz="1800" dirty="0"/>
           </a:p>
@@ -10026,7 +9937,7 @@
                 <a:ea typeface="Times New Roman" pitchFamily="34" charset="-122"/>
                 <a:cs typeface="Times New Roman" pitchFamily="34" charset="-120"/>
               </a:rPr>
-              <a:t>Name the layers of the forest from the top to the ground.</a:t>
+              <a:t>What is the name of the tallest layer of trees?</a:t>
             </a:r>
             <a:endParaRPr lang="en-US" sz="4000" dirty="0"/>
           </a:p>
@@ -10245,7 +10156,7 @@
                 <a:ea typeface="Times New Roman" pitchFamily="34" charset="-122"/>
                 <a:cs typeface="Times New Roman" pitchFamily="34" charset="-120"/>
               </a:rPr>
-              <a:t>The emergents, the canopy, the under-canopy, the shrub layer and the forest floor.</a:t>
+              <a:t>The emergents.</a:t>
             </a:r>
             <a:endParaRPr lang="en-US" sz="4000" dirty="0"/>
           </a:p>
@@ -10459,7 +10370,7 @@
                 <a:ea typeface="Times New Roman" pitchFamily="34" charset="-122"/>
                 <a:cs typeface="Times New Roman" pitchFamily="34" charset="-120"/>
               </a:rPr>
-              <a:t>A mangrove forest along a coast.</a:t>
+              <a:t>Mangroves.</a:t>
             </a:r>
             <a:endParaRPr lang="en-US" sz="1800" dirty="0"/>
           </a:p>
@@ -10678,7 +10589,7 @@
                 <a:ea typeface="Times New Roman" pitchFamily="34" charset="-122"/>
                 <a:cs typeface="Times New Roman" pitchFamily="34" charset="-120"/>
               </a:rPr>
-              <a:t>Where do mangroves grow in Cameroon? What is special about them?</a:t>
+              <a:t>Where do mangroves grow in Cameroon?</a:t>
             </a:r>
             <a:endParaRPr lang="en-US" sz="4000" dirty="0"/>
           </a:p>
@@ -10897,7 +10808,7 @@
                 <a:ea typeface="Times New Roman" pitchFamily="34" charset="-122"/>
                 <a:cs typeface="Times New Roman" pitchFamily="34" charset="-120"/>
               </a:rPr>
-              <a:t>They grow along the coast near Douala and Limbe, in salty water, on long roots above the mud.</a:t>
+              <a:t>Along the coast, near Douala and Limbe, in salty water.</a:t>
             </a:r>
             <a:endParaRPr lang="en-US" sz="4000" dirty="0"/>
           </a:p>
@@ -11330,7 +11241,7 @@
                 <a:ea typeface="Times New Roman" pitchFamily="34" charset="-122"/>
                 <a:cs typeface="Times New Roman" pitchFamily="34" charset="-120"/>
               </a:rPr>
-              <a:t>What is the colour of the soils of the forest region? What gives them this colour?</a:t>
+              <a:t>What gives the soils of the forest region their red colour?</a:t>
             </a:r>
             <a:endParaRPr lang="en-US" sz="4000" dirty="0"/>
           </a:p>
@@ -12558,7 +12469,7 @@
                 <a:ea typeface="Times New Roman" pitchFamily="34" charset="-122"/>
                 <a:cs typeface="Times New Roman" pitchFamily="34" charset="-120"/>
               </a:rPr>
-              <a:t>They are red or yellow ferrallitic soils. Iron in the soil gives the red colour.</a:t>
+              <a:t>The iron in the soil.</a:t>
             </a:r>
             <a:endParaRPr lang="en-US" sz="4000" dirty="0"/>
           </a:p>
@@ -12772,7 +12683,7 @@
                 <a:ea typeface="Times New Roman" pitchFamily="34" charset="-122"/>
                 <a:cs typeface="Times New Roman" pitchFamily="34" charset="-120"/>
               </a:rPr>
-              <a:t>Hard laterite used to make bricks.</a:t>
+              <a:t>A hard, red soil.</a:t>
             </a:r>
             <a:endParaRPr lang="en-US" sz="1800" dirty="0"/>
           </a:p>
@@ -12991,7 +12902,7 @@
                 <a:ea typeface="Times New Roman" pitchFamily="34" charset="-122"/>
                 <a:cs typeface="Times New Roman" pitchFamily="34" charset="-120"/>
               </a:rPr>
-              <a:t>Heavy rain washes plant food deep into the soil. What is this called, and what happens to the soil?</a:t>
+              <a:t>What do we call the washing of plant food deep into the soil by heavy rain?</a:t>
             </a:r>
             <a:endParaRPr lang="en-US" sz="4000" dirty="0"/>
           </a:p>
@@ -13210,7 +13121,7 @@
                 <a:ea typeface="Times New Roman" pitchFamily="34" charset="-122"/>
                 <a:cs typeface="Times New Roman" pitchFamily="34" charset="-120"/>
               </a:rPr>
-              <a:t>It is leaching. The top soil becomes poor, and a hard layer of laterite can form.</a:t>
+              <a:t>Leaching.</a:t>
             </a:r>
             <a:endParaRPr lang="en-US" sz="4000" dirty="0"/>
           </a:p>
@@ -13421,7 +13332,7 @@
               <a:buNone/>
             </a:pPr>
             <a:r>
-              <a:rPr lang="en-US" sz="4000" b="1" dirty="0">
+              <a:rPr lang="en-US" sz="3200" b="1" dirty="0">
                 <a:solidFill>
                   <a:srgbClr val="111111"/>
                 </a:solidFill>
@@ -13431,7 +13342,7 @@
               </a:rPr>
               <a:t>Topic: Man in His Environment</a:t>
             </a:r>
-            <a:endParaRPr lang="en-US" sz="4000" dirty="0"/>
+            <a:endParaRPr lang="en-US" sz="3200" dirty="0"/>
           </a:p>
           <a:p>
             <a:pPr algn="l" indent="0" marL="0">
@@ -13441,7 +13352,7 @@
               <a:buNone/>
             </a:pPr>
             <a:r>
-              <a:rPr lang="en-US" sz="4000" b="1" dirty="0">
+              <a:rPr lang="en-US" sz="3200" b="1" dirty="0">
                 <a:solidFill>
                   <a:srgbClr val="111111"/>
                 </a:solidFill>
@@ -13451,7 +13362,7 @@
               </a:rPr>
               <a:t>Sub-topic: Natural Regions</a:t>
             </a:r>
-            <a:endParaRPr lang="en-US" sz="4000" dirty="0"/>
+            <a:endParaRPr lang="en-US" sz="3200" dirty="0"/>
           </a:p>
           <a:p>
             <a:pPr algn="l" indent="0" marL="0">
@@ -13461,7 +13372,7 @@
               <a:buNone/>
             </a:pPr>
             <a:r>
-              <a:rPr lang="en-US" sz="4000" b="1" dirty="0">
+              <a:rPr lang="en-US" sz="3200" b="1" dirty="0">
                 <a:solidFill>
                   <a:srgbClr val="990011"/>
                 </a:solidFill>
@@ -13471,7 +13382,7 @@
               </a:rPr>
               <a:t>Lesson 1 (Part 2): The Equatorial Region: Characteristics (Soils and Vegetation)</a:t>
             </a:r>
-            <a:endParaRPr lang="en-US" sz="4000" dirty="0"/>
+            <a:endParaRPr lang="en-US" sz="3200" dirty="0"/>
           </a:p>
         </p:txBody>
       </p:sp>
@@ -13693,11 +13604,12 @@
             <a:endParaRPr lang="en-US" sz="4000" dirty="0"/>
           </a:p>
           <a:p>
-            <a:pPr algn="l" indent="0" marL="0">
+            <a:pPr algn="l" marL="342900" indent="-342900">
               <a:spcAft>
                 <a:spcPts val="800"/>
               </a:spcAft>
-              <a:buNone/>
+              <a:buSzPct val="100000"/>
+              <a:buChar char="•"/>
             </a:pPr>
             <a:r>
               <a:rPr lang="en-US" sz="4000" b="1" dirty="0">
@@ -13710,11 +13622,12 @@
               </a:rPr>
               <a:t>Evergreen forest: </a:t>
             </a:r>
-            <a:pPr algn="l" indent="0" marL="0">
+            <a:pPr algn="l" marL="342900" indent="-342900">
               <a:spcAft>
                 <a:spcPts val="800"/>
               </a:spcAft>
-              <a:buNone/>
+              <a:buSzPct val="100000"/>
+              <a:buChar char="•"/>
             </a:pPr>
             <a:r>
               <a:rPr lang="en-US" sz="4000" dirty="0">
@@ -13730,11 +13643,12 @@
             <a:endParaRPr lang="en-US" sz="4000" dirty="0"/>
           </a:p>
           <a:p>
-            <a:pPr algn="l" indent="0" marL="0">
+            <a:pPr algn="l" marL="342900" indent="-342900">
               <a:spcAft>
                 <a:spcPts val="800"/>
               </a:spcAft>
-              <a:buNone/>
+              <a:buSzPct val="100000"/>
+              <a:buChar char="•"/>
             </a:pPr>
             <a:r>
               <a:rPr lang="en-US" sz="4000" b="1" dirty="0">
@@ -13747,11 +13661,12 @@
               </a:rPr>
               <a:t>Leaching: </a:t>
             </a:r>
-            <a:pPr algn="l" indent="0" marL="0">
+            <a:pPr algn="l" marL="342900" indent="-342900">
               <a:spcAft>
                 <a:spcPts val="800"/>
               </a:spcAft>
-              <a:buNone/>
+              <a:buSzPct val="100000"/>
+              <a:buChar char="•"/>
             </a:pPr>
             <a:r>
               <a:rPr lang="en-US" sz="4000" dirty="0">
@@ -13880,9 +13795,131 @@
           </a:p>
         </p:txBody>
       </p:sp>
+      <p:sp>
+        <p:nvSpPr>
+          <p:cNvPr id="3" name="Text 1"/>
+          <p:cNvSpPr/>
+          <p:nvPr/>
+        </p:nvSpPr>
+        <p:spPr>
+          <a:xfrm>
+            <a:off x="365760" y="1005840"/>
+            <a:ext cx="11460175" cy="731520"/>
+          </a:xfrm>
+          <a:prstGeom prst="rect">
+            <a:avLst/>
+          </a:prstGeom>
+          <a:noFill/>
+          <a:ln/>
+        </p:spPr>
+        <p:txBody>
+          <a:bodyPr wrap="square" lIns="0" tIns="0" rIns="0" bIns="0" rtlCol="0" anchor="ctr">
+            <a:normAutofit/>
+          </a:bodyPr>
+          <a:lstStyle/>
+          <a:p>
+            <a:pPr algn="ctr" indent="0" marL="0">
+              <a:buNone/>
+            </a:pPr>
+            <a:r>
+              <a:rPr lang="en-US" sz="3600" b="1" dirty="0">
+                <a:solidFill>
+                  <a:srgbClr val="990011"/>
+                </a:solidFill>
+                <a:latin typeface="Times New Roman" pitchFamily="34" charset="0"/>
+                <a:ea typeface="Times New Roman" pitchFamily="34" charset="-122"/>
+                <a:cs typeface="Times New Roman" pitchFamily="34" charset="-120"/>
+              </a:rPr>
+              <a:t>1. Vegetation</a:t>
+            </a:r>
+            <a:endParaRPr lang="en-US" sz="3600" dirty="0"/>
+          </a:p>
+        </p:txBody>
+      </p:sp>
+      <p:sp>
+        <p:nvSpPr>
+          <p:cNvPr id="4" name="Text 2"/>
+          <p:cNvSpPr/>
+          <p:nvPr/>
+        </p:nvSpPr>
+        <p:spPr>
+          <a:xfrm>
+            <a:off x="365760" y="1783080"/>
+            <a:ext cx="4846320" cy="4617720"/>
+          </a:xfrm>
+          <a:prstGeom prst="rect">
+            <a:avLst/>
+          </a:prstGeom>
+          <a:noFill/>
+          <a:ln/>
+        </p:spPr>
+        <p:txBody>
+          <a:bodyPr wrap="square" lIns="0" tIns="0" rIns="0" bIns="0" rtlCol="0" anchor="t"/>
+          <a:lstStyle/>
+          <a:p>
+            <a:pPr algn="l" indent="0" marL="0">
+              <a:spcAft>
+                <a:spcPts val="800"/>
+              </a:spcAft>
+              <a:buNone/>
+            </a:pPr>
+            <a:r>
+              <a:rPr lang="en-US" sz="3600" i="1" dirty="0">
+                <a:solidFill>
+                  <a:srgbClr val="111111"/>
+                </a:solidFill>
+                <a:latin typeface="Times New Roman" pitchFamily="34" charset="0"/>
+                <a:ea typeface="Times New Roman" pitchFamily="34" charset="-122"/>
+                <a:cs typeface="Times New Roman" pitchFamily="34" charset="-120"/>
+              </a:rPr>
+              <a:t>The equatorial forest has the following characteristics:</a:t>
+            </a:r>
+            <a:endParaRPr lang="en-US" sz="3600" dirty="0"/>
+          </a:p>
+          <a:p>
+            <a:pPr algn="l" marL="342900" indent="-342900">
+              <a:spcAft>
+                <a:spcPts val="800"/>
+              </a:spcAft>
+              <a:buSzPct val="100000"/>
+              <a:buChar char="•"/>
+            </a:pPr>
+            <a:r>
+              <a:rPr lang="en-US" sz="3600" b="1" dirty="0">
+                <a:solidFill>
+                  <a:srgbClr val="111111"/>
+                </a:solidFill>
+                <a:latin typeface="Times New Roman" pitchFamily="34" charset="0"/>
+                <a:ea typeface="Times New Roman" pitchFamily="34" charset="-122"/>
+                <a:cs typeface="Times New Roman" pitchFamily="34" charset="-120"/>
+              </a:rPr>
+              <a:t>Evergreen: </a:t>
+            </a:r>
+            <a:pPr algn="l" marL="342900" indent="-342900">
+              <a:spcAft>
+                <a:spcPts val="800"/>
+              </a:spcAft>
+              <a:buSzPct val="100000"/>
+              <a:buChar char="•"/>
+            </a:pPr>
+            <a:r>
+              <a:rPr lang="en-US" sz="3600" dirty="0">
+                <a:solidFill>
+                  <a:srgbClr val="111111"/>
+                </a:solidFill>
+                <a:latin typeface="Times New Roman" pitchFamily="34" charset="0"/>
+                <a:ea typeface="Times New Roman" pitchFamily="34" charset="-122"/>
+                <a:cs typeface="Times New Roman" pitchFamily="34" charset="-120"/>
+              </a:rPr>
+              <a:t>The trees are green all year.</a:t>
+            </a:r>
+            <a:endParaRPr lang="en-US" sz="3600" dirty="0"/>
+          </a:p>
+        </p:txBody>
+      </p:sp>
       <p:pic>
         <p:nvPicPr>
-          <p:cNvPr id="3" name="Image 0" descr="/home/claude/f4/img/minesec_sheet.png">    </p:cNvPr>
+          <p:cNvPr id="5" name="Image 0" descr="/home/claude/f4/img/v2/f2t_rainforest.jpg">    </p:cNvPr>
           <p:cNvPicPr>
             <a:picLocks noChangeAspect="1"/>
           </p:cNvPicPr>
@@ -13896,8 +13933,8 @@
         </p:blipFill>
         <p:spPr>
           <a:xfrm>
-            <a:off x="0" y="658368"/>
-            <a:ext cx="5120640" cy="5833872"/>
+            <a:off x="5349240" y="2071212"/>
+            <a:ext cx="6659575" cy="3693983"/>
           </a:xfrm>
           <a:prstGeom prst="rect">
             <a:avLst/>
@@ -13906,14 +13943,14 @@
       </p:pic>
       <p:sp>
         <p:nvSpPr>
-          <p:cNvPr id="4" name="Text 1"/>
+          <p:cNvPr id="6" name="Text 3"/>
           <p:cNvSpPr/>
           <p:nvPr/>
         </p:nvSpPr>
         <p:spPr>
           <a:xfrm>
-            <a:off x="5349240" y="1005840"/>
-            <a:ext cx="6522415" cy="731520"/>
+            <a:off x="5349240" y="6089904"/>
+            <a:ext cx="6659575" cy="347472"/>
           </a:xfrm>
           <a:prstGeom prst="rect">
             <a:avLst/>
@@ -13922,105 +13959,24 @@
           <a:ln/>
         </p:spPr>
         <p:txBody>
-          <a:bodyPr wrap="square" lIns="0" tIns="0" rIns="0" bIns="0" rtlCol="0" anchor="ctr">
-            <a:normAutofit/>
-          </a:bodyPr>
+          <a:bodyPr wrap="square" lIns="0" tIns="0" rIns="0" bIns="0" rtlCol="0" anchor="ctr"/>
           <a:lstStyle/>
           <a:p>
             <a:pPr algn="ctr" indent="0" marL="0">
               <a:buNone/>
             </a:pPr>
             <a:r>
-              <a:rPr lang="en-US" sz="3600" b="1" dirty="0">
-                <a:solidFill>
-                  <a:srgbClr val="990011"/>
+              <a:rPr lang="en-US" sz="1600" i="1" dirty="0">
+                <a:solidFill>
+                  <a:srgbClr val="555555"/>
                 </a:solidFill>
                 <a:latin typeface="Times New Roman" pitchFamily="34" charset="0"/>
                 <a:ea typeface="Times New Roman" pitchFamily="34" charset="-122"/>
                 <a:cs typeface="Times New Roman" pitchFamily="34" charset="-120"/>
               </a:rPr>
-              <a:t>1. Vegetation</a:t>
-            </a:r>
-            <a:endParaRPr lang="en-US" sz="3600" dirty="0"/>
-          </a:p>
-        </p:txBody>
-      </p:sp>
-      <p:sp>
-        <p:nvSpPr>
-          <p:cNvPr id="5" name="Text 2"/>
-          <p:cNvSpPr/>
-          <p:nvPr/>
-        </p:nvSpPr>
-        <p:spPr>
-          <a:xfrm>
-            <a:off x="5349240" y="1783080"/>
-            <a:ext cx="6522415" cy="4663440"/>
-          </a:xfrm>
-          <a:prstGeom prst="rect">
-            <a:avLst/>
-          </a:prstGeom>
-          <a:noFill/>
-          <a:ln/>
-        </p:spPr>
-        <p:txBody>
-          <a:bodyPr wrap="square" lIns="0" tIns="0" rIns="0" bIns="0" rtlCol="0" anchor="t"/>
-          <a:lstStyle/>
-          <a:p>
-            <a:pPr algn="l" indent="0" marL="0">
-              <a:spcAft>
-                <a:spcPts val="800"/>
-              </a:spcAft>
-              <a:buNone/>
-            </a:pPr>
-            <a:r>
-              <a:rPr lang="en-US" sz="4000" i="1" dirty="0">
-                <a:solidFill>
-                  <a:srgbClr val="111111"/>
-                </a:solidFill>
-                <a:latin typeface="Times New Roman" pitchFamily="34" charset="0"/>
-                <a:ea typeface="Times New Roman" pitchFamily="34" charset="-122"/>
-                <a:cs typeface="Times New Roman" pitchFamily="34" charset="-120"/>
-              </a:rPr>
-              <a:t>The equatorial forest has the following characteristics:</a:t>
-            </a:r>
-            <a:endParaRPr lang="en-US" sz="4000" dirty="0"/>
-          </a:p>
-          <a:p>
-            <a:pPr algn="l" indent="0" marL="0">
-              <a:spcAft>
-                <a:spcPts val="800"/>
-              </a:spcAft>
-              <a:buNone/>
-            </a:pPr>
-            <a:r>
-              <a:rPr lang="en-US" sz="4000" b="1" dirty="0">
-                <a:solidFill>
-                  <a:srgbClr val="111111"/>
-                </a:solidFill>
-                <a:latin typeface="Times New Roman" pitchFamily="34" charset="0"/>
-                <a:ea typeface="Times New Roman" pitchFamily="34" charset="-122"/>
-                <a:cs typeface="Times New Roman" pitchFamily="34" charset="-120"/>
-              </a:rPr>
-              <a:t>Evergreen forest: </a:t>
-            </a:r>
-            <a:pPr algn="l" indent="0" marL="0">
-              <a:spcAft>
-                <a:spcPts val="800"/>
-              </a:spcAft>
-              <a:buNone/>
-            </a:pPr>
-            <a:r>
-              <a:rPr lang="en-US" sz="4000" dirty="0">
-                <a:solidFill>
-                  <a:srgbClr val="111111"/>
-                </a:solidFill>
-                <a:latin typeface="Times New Roman" pitchFamily="34" charset="0"/>
-                <a:ea typeface="Times New Roman" pitchFamily="34" charset="-122"/>
-                <a:cs typeface="Times New Roman" pitchFamily="34" charset="-120"/>
-              </a:rPr>
-              <a:t>The forest is green all year because it is hot and wet in every month.</a:t>
-            </a:r>
-            <a:endParaRPr lang="en-US" sz="4000" dirty="0"/>
+              <a:t>Illustration: the equatorial forest</a:t>
+            </a:r>
+            <a:endParaRPr lang="en-US" sz="1600" dirty="0"/>
           </a:p>
         </p:txBody>
       </p:sp>
@@ -14136,9 +14092,111 @@
           </a:p>
         </p:txBody>
       </p:sp>
+      <p:sp>
+        <p:nvSpPr>
+          <p:cNvPr id="3" name="Text 1"/>
+          <p:cNvSpPr/>
+          <p:nvPr/>
+        </p:nvSpPr>
+        <p:spPr>
+          <a:xfrm>
+            <a:off x="365760" y="1005840"/>
+            <a:ext cx="11460175" cy="731520"/>
+          </a:xfrm>
+          <a:prstGeom prst="rect">
+            <a:avLst/>
+          </a:prstGeom>
+          <a:noFill/>
+          <a:ln/>
+        </p:spPr>
+        <p:txBody>
+          <a:bodyPr wrap="square" lIns="0" tIns="0" rIns="0" bIns="0" rtlCol="0" anchor="ctr">
+            <a:normAutofit/>
+          </a:bodyPr>
+          <a:lstStyle/>
+          <a:p>
+            <a:pPr algn="ctr" indent="0" marL="0">
+              <a:buNone/>
+            </a:pPr>
+            <a:r>
+              <a:rPr lang="en-US" sz="3600" b="1" dirty="0">
+                <a:solidFill>
+                  <a:srgbClr val="990011"/>
+                </a:solidFill>
+                <a:latin typeface="Times New Roman" pitchFamily="34" charset="0"/>
+                <a:ea typeface="Times New Roman" pitchFamily="34" charset="-122"/>
+                <a:cs typeface="Times New Roman" pitchFamily="34" charset="-120"/>
+              </a:rPr>
+              <a:t>1. Vegetation</a:t>
+            </a:r>
+            <a:endParaRPr lang="en-US" sz="3600" dirty="0"/>
+          </a:p>
+        </p:txBody>
+      </p:sp>
+      <p:sp>
+        <p:nvSpPr>
+          <p:cNvPr id="4" name="Text 2"/>
+          <p:cNvSpPr/>
+          <p:nvPr/>
+        </p:nvSpPr>
+        <p:spPr>
+          <a:xfrm>
+            <a:off x="365760" y="1783080"/>
+            <a:ext cx="4846320" cy="4617720"/>
+          </a:xfrm>
+          <a:prstGeom prst="rect">
+            <a:avLst/>
+          </a:prstGeom>
+          <a:noFill/>
+          <a:ln/>
+        </p:spPr>
+        <p:txBody>
+          <a:bodyPr wrap="square" lIns="0" tIns="0" rIns="0" bIns="0" rtlCol="0" anchor="t"/>
+          <a:lstStyle/>
+          <a:p>
+            <a:pPr algn="l" marL="342900" indent="-342900">
+              <a:spcAft>
+                <a:spcPts val="800"/>
+              </a:spcAft>
+              <a:buSzPct val="100000"/>
+              <a:buChar char="•"/>
+            </a:pPr>
+            <a:r>
+              <a:rPr lang="en-US" sz="3600" b="1" dirty="0">
+                <a:solidFill>
+                  <a:srgbClr val="111111"/>
+                </a:solidFill>
+                <a:latin typeface="Times New Roman" pitchFamily="34" charset="0"/>
+                <a:ea typeface="Times New Roman" pitchFamily="34" charset="-122"/>
+                <a:cs typeface="Times New Roman" pitchFamily="34" charset="-120"/>
+              </a:rPr>
+              <a:t>Layers: </a:t>
+            </a:r>
+            <a:pPr algn="l" marL="342900" indent="-342900">
+              <a:spcAft>
+                <a:spcPts val="800"/>
+              </a:spcAft>
+              <a:buSzPct val="100000"/>
+              <a:buChar char="•"/>
+            </a:pPr>
+            <a:r>
+              <a:rPr lang="en-US" sz="3600" dirty="0">
+                <a:solidFill>
+                  <a:srgbClr val="111111"/>
+                </a:solidFill>
+                <a:latin typeface="Times New Roman" pitchFamily="34" charset="0"/>
+                <a:ea typeface="Times New Roman" pitchFamily="34" charset="-122"/>
+                <a:cs typeface="Times New Roman" pitchFamily="34" charset="-120"/>
+              </a:rPr>
+              <a:t>Emergents, canopy, under-canopy, shrubs and forest floor.</a:t>
+            </a:r>
+            <a:endParaRPr lang="en-US" sz="3600" dirty="0"/>
+          </a:p>
+        </p:txBody>
+      </p:sp>
       <p:pic>
         <p:nvPicPr>
-          <p:cNvPr id="3" name="Image 0" descr="/home/claude/f4/img/minesec_sheet.png">    </p:cNvPr>
+          <p:cNvPr id="5" name="Image 0" descr="/home/claude/f4/img/v2/rainforest_layers_big.png">    </p:cNvPr>
           <p:cNvPicPr>
             <a:picLocks noChangeAspect="1"/>
           </p:cNvPicPr>
@@ -14152,8 +14210,8 @@
         </p:blipFill>
         <p:spPr>
           <a:xfrm>
-            <a:off x="0" y="658368"/>
-            <a:ext cx="3840480" cy="5833872"/>
+            <a:off x="5349240" y="2617506"/>
+            <a:ext cx="6659575" cy="2601397"/>
           </a:xfrm>
           <a:prstGeom prst="rect">
             <a:avLst/>
@@ -14162,14 +14220,14 @@
       </p:pic>
       <p:sp>
         <p:nvSpPr>
-          <p:cNvPr id="4" name="Text 1"/>
+          <p:cNvPr id="6" name="Text 3"/>
           <p:cNvSpPr/>
           <p:nvPr/>
         </p:nvSpPr>
         <p:spPr>
           <a:xfrm>
-            <a:off x="4069080" y="1005840"/>
-            <a:ext cx="7802575" cy="731520"/>
+            <a:off x="5349240" y="6089904"/>
+            <a:ext cx="6659575" cy="347472"/>
           </a:xfrm>
           <a:prstGeom prst="rect">
             <a:avLst/>
@@ -14178,122 +14236,24 @@
           <a:ln/>
         </p:spPr>
         <p:txBody>
-          <a:bodyPr wrap="square" lIns="0" tIns="0" rIns="0" bIns="0" rtlCol="0" anchor="ctr">
-            <a:normAutofit/>
-          </a:bodyPr>
+          <a:bodyPr wrap="square" lIns="0" tIns="0" rIns="0" bIns="0" rtlCol="0" anchor="ctr"/>
           <a:lstStyle/>
           <a:p>
             <a:pPr algn="ctr" indent="0" marL="0">
               <a:buNone/>
             </a:pPr>
             <a:r>
-              <a:rPr lang="en-US" sz="3600" b="1" dirty="0">
-                <a:solidFill>
-                  <a:srgbClr val="990011"/>
+              <a:rPr lang="en-US" sz="1600" i="1" dirty="0">
+                <a:solidFill>
+                  <a:srgbClr val="555555"/>
                 </a:solidFill>
                 <a:latin typeface="Times New Roman" pitchFamily="34" charset="0"/>
                 <a:ea typeface="Times New Roman" pitchFamily="34" charset="-122"/>
                 <a:cs typeface="Times New Roman" pitchFamily="34" charset="-120"/>
               </a:rPr>
-              <a:t>1. Vegetation (continued)</a:t>
-            </a:r>
-            <a:endParaRPr lang="en-US" sz="3600" dirty="0"/>
-          </a:p>
-        </p:txBody>
-      </p:sp>
-      <p:sp>
-        <p:nvSpPr>
-          <p:cNvPr id="5" name="Text 2"/>
-          <p:cNvSpPr/>
-          <p:nvPr/>
-        </p:nvSpPr>
-        <p:spPr>
-          <a:xfrm>
-            <a:off x="4069080" y="1783080"/>
-            <a:ext cx="7802575" cy="4663440"/>
-          </a:xfrm>
-          <a:prstGeom prst="rect">
-            <a:avLst/>
-          </a:prstGeom>
-          <a:noFill/>
-          <a:ln/>
-        </p:spPr>
-        <p:txBody>
-          <a:bodyPr wrap="square" lIns="0" tIns="0" rIns="0" bIns="0" rtlCol="0" anchor="t"/>
-          <a:lstStyle/>
-          <a:p>
-            <a:pPr algn="l" indent="0" marL="0">
-              <a:spcAft>
-                <a:spcPts val="800"/>
-              </a:spcAft>
-              <a:buNone/>
-            </a:pPr>
-            <a:r>
-              <a:rPr lang="en-US" sz="4000" b="1" dirty="0">
-                <a:solidFill>
-                  <a:srgbClr val="111111"/>
-                </a:solidFill>
-                <a:latin typeface="Times New Roman" pitchFamily="34" charset="0"/>
-                <a:ea typeface="Times New Roman" pitchFamily="34" charset="-122"/>
-                <a:cs typeface="Times New Roman" pitchFamily="34" charset="-120"/>
-              </a:rPr>
-              <a:t>Layers: </a:t>
-            </a:r>
-            <a:pPr algn="l" indent="0" marL="0">
-              <a:spcAft>
-                <a:spcPts val="800"/>
-              </a:spcAft>
-              <a:buNone/>
-            </a:pPr>
-            <a:r>
-              <a:rPr lang="en-US" sz="4000" dirty="0">
-                <a:solidFill>
-                  <a:srgbClr val="111111"/>
-                </a:solidFill>
-                <a:latin typeface="Times New Roman" pitchFamily="34" charset="0"/>
-                <a:ea typeface="Times New Roman" pitchFamily="34" charset="-122"/>
-                <a:cs typeface="Times New Roman" pitchFamily="34" charset="-120"/>
-              </a:rPr>
-              <a:t>The forest has layers: emergents, canopy, under-canopy, shrubs and the forest floor.</a:t>
-            </a:r>
-            <a:endParaRPr lang="en-US" sz="4000" dirty="0"/>
-          </a:p>
-          <a:p>
-            <a:pPr algn="l" indent="0" marL="0">
-              <a:spcAft>
-                <a:spcPts val="800"/>
-              </a:spcAft>
-              <a:buNone/>
-            </a:pPr>
-            <a:r>
-              <a:rPr lang="en-US" sz="4000" b="1" dirty="0">
-                <a:solidFill>
-                  <a:srgbClr val="111111"/>
-                </a:solidFill>
-                <a:latin typeface="Times New Roman" pitchFamily="34" charset="0"/>
-                <a:ea typeface="Times New Roman" pitchFamily="34" charset="-122"/>
-                <a:cs typeface="Times New Roman" pitchFamily="34" charset="-120"/>
-              </a:rPr>
-              <a:t>Hardwood trees: </a:t>
-            </a:r>
-            <a:pPr algn="l" indent="0" marL="0">
-              <a:spcAft>
-                <a:spcPts val="800"/>
-              </a:spcAft>
-              <a:buNone/>
-            </a:pPr>
-            <a:r>
-              <a:rPr lang="en-US" sz="4000" dirty="0">
-                <a:solidFill>
-                  <a:srgbClr val="111111"/>
-                </a:solidFill>
-                <a:latin typeface="Times New Roman" pitchFamily="34" charset="0"/>
-                <a:ea typeface="Times New Roman" pitchFamily="34" charset="-122"/>
-                <a:cs typeface="Times New Roman" pitchFamily="34" charset="-120"/>
-              </a:rPr>
-              <a:t>Valuable hardwoods such as sapele, iroko, mahogany and ebony grow scattered in the forest.</a:t>
-            </a:r>
-            <a:endParaRPr lang="en-US" sz="4000" dirty="0"/>
+              <a:t>Illustration: the layers of the forest</a:t>
+            </a:r>
+            <a:endParaRPr lang="en-US" sz="1600" dirty="0"/>
           </a:p>
         </p:txBody>
       </p:sp>
@@ -14426,7 +14386,7 @@
         <p:spPr>
           <a:xfrm>
             <a:off x="0" y="658368"/>
-            <a:ext cx="5120640" cy="5833872"/>
+            <a:ext cx="3840480" cy="5833872"/>
           </a:xfrm>
           <a:prstGeom prst="rect">
             <a:avLst/>
@@ -14441,8 +14401,8 @@
         </p:nvSpPr>
         <p:spPr>
           <a:xfrm>
-            <a:off x="5349240" y="1005840"/>
-            <a:ext cx="6522415" cy="731520"/>
+            <a:off x="4069080" y="1005840"/>
+            <a:ext cx="7802575" cy="731520"/>
           </a:xfrm>
           <a:prstGeom prst="rect">
             <a:avLst/>
@@ -14468,7 +14428,7 @@
                 <a:ea typeface="Times New Roman" pitchFamily="34" charset="-122"/>
                 <a:cs typeface="Times New Roman" pitchFamily="34" charset="-120"/>
               </a:rPr>
-              <a:t>1. Vegetation (continued)</a:t>
+              <a:t>1. Vegetation</a:t>
             </a:r>
             <a:endParaRPr lang="en-US" sz="3600" dirty="0"/>
           </a:p>
@@ -14482,8 +14442,8 @@
         </p:nvSpPr>
         <p:spPr>
           <a:xfrm>
-            <a:off x="5349240" y="1783080"/>
-            <a:ext cx="6522415" cy="4663440"/>
+            <a:off x="4069080" y="1783080"/>
+            <a:ext cx="7802575" cy="4663440"/>
           </a:xfrm>
           <a:prstGeom prst="rect">
             <a:avLst/>
@@ -14495,11 +14455,51 @@
           <a:bodyPr wrap="square" lIns="0" tIns="0" rIns="0" bIns="0" rtlCol="0" anchor="t"/>
           <a:lstStyle/>
           <a:p>
-            <a:pPr algn="l" indent="0" marL="0">
+            <a:pPr algn="l" marL="342900" indent="-342900">
               <a:spcAft>
                 <a:spcPts val="800"/>
               </a:spcAft>
-              <a:buNone/>
+              <a:buSzPct val="100000"/>
+              <a:buChar char="•"/>
+            </a:pPr>
+            <a:r>
+              <a:rPr lang="en-US" sz="4000" b="1" dirty="0">
+                <a:solidFill>
+                  <a:srgbClr val="111111"/>
+                </a:solidFill>
+                <a:latin typeface="Times New Roman" pitchFamily="34" charset="0"/>
+                <a:ea typeface="Times New Roman" pitchFamily="34" charset="-122"/>
+                <a:cs typeface="Times New Roman" pitchFamily="34" charset="-120"/>
+              </a:rPr>
+              <a:t>Hardwoods: </a:t>
+            </a:r>
+            <a:pPr algn="l" marL="342900" indent="-342900">
+              <a:spcAft>
+                <a:spcPts val="800"/>
+              </a:spcAft>
+              <a:buSzPct val="100000"/>
+              <a:buChar char="•"/>
+            </a:pPr>
+            <a:r>
+              <a:rPr lang="en-US" sz="4000" dirty="0">
+                <a:solidFill>
+                  <a:srgbClr val="111111"/>
+                </a:solidFill>
+                <a:latin typeface="Times New Roman" pitchFamily="34" charset="0"/>
+                <a:ea typeface="Times New Roman" pitchFamily="34" charset="-122"/>
+                <a:cs typeface="Times New Roman" pitchFamily="34" charset="-120"/>
+              </a:rPr>
+              <a:t>Sapele, iroko, mahogany and ebony.</a:t>
+            </a:r>
+            <a:endParaRPr lang="en-US" sz="4000" dirty="0"/>
+          </a:p>
+          <a:p>
+            <a:pPr algn="l" marL="342900" indent="-342900">
+              <a:spcAft>
+                <a:spcPts val="800"/>
+              </a:spcAft>
+              <a:buSzPct val="100000"/>
+              <a:buChar char="•"/>
             </a:pPr>
             <a:r>
               <a:rPr lang="en-US" sz="4000" b="1" dirty="0">
@@ -14512,11 +14512,12 @@
               </a:rPr>
               <a:t>Climbers: </a:t>
             </a:r>
-            <a:pPr algn="l" indent="0" marL="0">
+            <a:pPr algn="l" marL="342900" indent="-342900">
               <a:spcAft>
                 <a:spcPts val="800"/>
               </a:spcAft>
-              <a:buNone/>
+              <a:buSzPct val="100000"/>
+              <a:buChar char="•"/>
             </a:pPr>
             <a:r>
               <a:rPr lang="en-US" sz="4000" dirty="0">
@@ -14527,16 +14528,17 @@
                 <a:ea typeface="Times New Roman" pitchFamily="34" charset="-122"/>
                 <a:cs typeface="Times New Roman" pitchFamily="34" charset="-120"/>
               </a:rPr>
-              <a:t>Climbing plants called lianas grow up the trees towards the light.</a:t>
+              <a:t>Lianas climb up the trees towards the light.</a:t>
             </a:r>
             <a:endParaRPr lang="en-US" sz="4000" dirty="0"/>
           </a:p>
           <a:p>
-            <a:pPr algn="l" indent="0" marL="0">
+            <a:pPr algn="l" marL="342900" indent="-342900">
               <a:spcAft>
                 <a:spcPts val="800"/>
               </a:spcAft>
-              <a:buNone/>
+              <a:buSzPct val="100000"/>
+              <a:buChar char="•"/>
             </a:pPr>
             <a:r>
               <a:rPr lang="en-US" sz="4000" b="1" dirty="0">
@@ -14549,11 +14551,12 @@
               </a:rPr>
               <a:t>Mangroves: </a:t>
             </a:r>
-            <a:pPr algn="l" indent="0" marL="0">
+            <a:pPr algn="l" marL="342900" indent="-342900">
               <a:spcAft>
                 <a:spcPts val="800"/>
               </a:spcAft>
-              <a:buNone/>
+              <a:buSzPct val="100000"/>
+              <a:buChar char="•"/>
             </a:pPr>
             <a:r>
               <a:rPr lang="en-US" sz="4000" dirty="0">
@@ -14564,7 +14567,7 @@
                 <a:ea typeface="Times New Roman" pitchFamily="34" charset="-122"/>
                 <a:cs typeface="Times New Roman" pitchFamily="34" charset="-120"/>
               </a:rPr>
-              <a:t>Mangrove forests grow in salty water along the coast near Douala and Limbe.</a:t>
+              <a:t>They grow in salty water along the coast.</a:t>
             </a:r>
             <a:endParaRPr lang="en-US" sz="4000" dirty="0"/>
           </a:p>
@@ -14690,8 +14693,8 @@
         </p:nvSpPr>
         <p:spPr>
           <a:xfrm>
-            <a:off x="457200" y="1005840"/>
-            <a:ext cx="11277295" cy="731520"/>
+            <a:off x="365760" y="1005840"/>
+            <a:ext cx="11460175" cy="731520"/>
           </a:xfrm>
           <a:prstGeom prst="rect">
             <a:avLst/>
@@ -14700,7 +14703,9 @@
           <a:ln/>
         </p:spPr>
         <p:txBody>
-          <a:bodyPr wrap="square" lIns="0" tIns="0" rIns="0" bIns="0" rtlCol="0" anchor="ctr"/>
+          <a:bodyPr wrap="square" lIns="0" tIns="0" rIns="0" bIns="0" rtlCol="0" anchor="ctr">
+            <a:normAutofit/>
+          </a:bodyPr>
           <a:lstStyle/>
           <a:p>
             <a:pPr algn="ctr" indent="0" marL="0">
@@ -14715,7 +14720,88 @@
                 <a:ea typeface="Times New Roman" pitchFamily="34" charset="-122"/>
                 <a:cs typeface="Times New Roman" pitchFamily="34" charset="-120"/>
               </a:rPr>
-              <a:t>1. Vegetation</a:t>
+              <a:t>2. Soils</a:t>
+            </a:r>
+            <a:endParaRPr lang="en-US" sz="3600" dirty="0"/>
+          </a:p>
+        </p:txBody>
+      </p:sp>
+      <p:sp>
+        <p:nvSpPr>
+          <p:cNvPr id="4" name="Text 2"/>
+          <p:cNvSpPr/>
+          <p:nvPr/>
+        </p:nvSpPr>
+        <p:spPr>
+          <a:xfrm>
+            <a:off x="365760" y="1783080"/>
+            <a:ext cx="4846320" cy="4617720"/>
+          </a:xfrm>
+          <a:prstGeom prst="rect">
+            <a:avLst/>
+          </a:prstGeom>
+          <a:noFill/>
+          <a:ln/>
+        </p:spPr>
+        <p:txBody>
+          <a:bodyPr wrap="square" lIns="0" tIns="0" rIns="0" bIns="0" rtlCol="0" anchor="t"/>
+          <a:lstStyle/>
+          <a:p>
+            <a:pPr algn="l" indent="0" marL="0">
+              <a:spcAft>
+                <a:spcPts val="800"/>
+              </a:spcAft>
+              <a:buNone/>
+            </a:pPr>
+            <a:r>
+              <a:rPr lang="en-US" sz="3600" i="1" dirty="0">
+                <a:solidFill>
+                  <a:srgbClr val="111111"/>
+                </a:solidFill>
+                <a:latin typeface="Times New Roman" pitchFamily="34" charset="0"/>
+                <a:ea typeface="Times New Roman" pitchFamily="34" charset="-122"/>
+                <a:cs typeface="Times New Roman" pitchFamily="34" charset="-120"/>
+              </a:rPr>
+              <a:t>The soils have the following characteristics:</a:t>
+            </a:r>
+            <a:endParaRPr lang="en-US" sz="3600" dirty="0"/>
+          </a:p>
+          <a:p>
+            <a:pPr algn="l" marL="342900" indent="-342900">
+              <a:spcAft>
+                <a:spcPts val="800"/>
+              </a:spcAft>
+              <a:buSzPct val="100000"/>
+              <a:buChar char="•"/>
+            </a:pPr>
+            <a:r>
+              <a:rPr lang="en-US" sz="3600" b="1" dirty="0">
+                <a:solidFill>
+                  <a:srgbClr val="111111"/>
+                </a:solidFill>
+                <a:latin typeface="Times New Roman" pitchFamily="34" charset="0"/>
+                <a:ea typeface="Times New Roman" pitchFamily="34" charset="-122"/>
+                <a:cs typeface="Times New Roman" pitchFamily="34" charset="-120"/>
+              </a:rPr>
+              <a:t>Ferrallitic soils: </a:t>
+            </a:r>
+            <a:pPr algn="l" marL="342900" indent="-342900">
+              <a:spcAft>
+                <a:spcPts val="800"/>
+              </a:spcAft>
+              <a:buSzPct val="100000"/>
+              <a:buChar char="•"/>
+            </a:pPr>
+            <a:r>
+              <a:rPr lang="en-US" sz="3600" dirty="0">
+                <a:solidFill>
+                  <a:srgbClr val="111111"/>
+                </a:solidFill>
+                <a:latin typeface="Times New Roman" pitchFamily="34" charset="0"/>
+                <a:ea typeface="Times New Roman" pitchFamily="34" charset="-122"/>
+                <a:cs typeface="Times New Roman" pitchFamily="34" charset="-120"/>
+              </a:rPr>
+              <a:t>They are red or yellow because of iron.</a:t>
             </a:r>
             <a:endParaRPr lang="en-US" sz="3600" dirty="0"/>
           </a:p>
@@ -14723,7 +14809,7 @@
       </p:sp>
       <p:pic>
         <p:nvPicPr>
-          <p:cNvPr id="4" name="Image 0" descr="/home/claude/f4/img/v2/rainforest_layers_big.png">    </p:cNvPr>
+          <p:cNvPr id="5" name="Image 0" descr="/home/claude/f4/img/v2/f4_redsoil.jpg">    </p:cNvPr>
           <p:cNvPicPr>
             <a:picLocks noChangeAspect="1"/>
           </p:cNvPicPr>
@@ -14737,8 +14823,8 @@
         </p:blipFill>
         <p:spPr>
           <a:xfrm>
-            <a:off x="629930" y="1783080"/>
-            <a:ext cx="10931835" cy="4270248"/>
+            <a:off x="5349240" y="2071212"/>
+            <a:ext cx="6659575" cy="3693983"/>
           </a:xfrm>
           <a:prstGeom prst="rect">
             <a:avLst/>
@@ -14747,14 +14833,14 @@
       </p:pic>
       <p:sp>
         <p:nvSpPr>
-          <p:cNvPr id="5" name="Text 2"/>
+          <p:cNvPr id="6" name="Text 3"/>
           <p:cNvSpPr/>
           <p:nvPr/>
         </p:nvSpPr>
         <p:spPr>
           <a:xfrm>
-            <a:off x="457200" y="6089904"/>
-            <a:ext cx="11277295" cy="347472"/>
+            <a:off x="5349240" y="6089904"/>
+            <a:ext cx="6659575" cy="347472"/>
           </a:xfrm>
           <a:prstGeom prst="rect">
             <a:avLst/>
@@ -14770,7 +14856,7 @@
               <a:buNone/>
             </a:pPr>
             <a:r>
-              <a:rPr lang="en-US" sz="1800" i="1" dirty="0">
+              <a:rPr lang="en-US" sz="1600" i="1" dirty="0">
                 <a:solidFill>
                   <a:srgbClr val="555555"/>
                 </a:solidFill>
@@ -14778,9 +14864,9 @@
                 <a:ea typeface="Times New Roman" pitchFamily="34" charset="-122"/>
                 <a:cs typeface="Times New Roman" pitchFamily="34" charset="-120"/>
               </a:rPr>
-              <a:t>Illustration: the layers of the equatorial forest</a:t>
-            </a:r>
-            <a:endParaRPr lang="en-US" sz="1800" dirty="0"/>
+              <a:t>Illustration: a red soil</a:t>
+            </a:r>
+            <a:endParaRPr lang="en-US" sz="1600" dirty="0"/>
           </a:p>
         </p:txBody>
       </p:sp>
@@ -15152,7 +15238,7 @@
         <p:spPr>
           <a:xfrm>
             <a:off x="0" y="658368"/>
-            <a:ext cx="2468880" cy="5833872"/>
+            <a:ext cx="5120640" cy="5833872"/>
           </a:xfrm>
           <a:prstGeom prst="rect">
             <a:avLst/>
@@ -15167,8 +15253,8 @@
         </p:nvSpPr>
         <p:spPr>
           <a:xfrm>
-            <a:off x="2697480" y="1005840"/>
-            <a:ext cx="9174175" cy="731520"/>
+            <a:off x="5349240" y="1005840"/>
+            <a:ext cx="6522415" cy="731520"/>
           </a:xfrm>
           <a:prstGeom prst="rect">
             <a:avLst/>
@@ -15208,8 +15294,8 @@
         </p:nvSpPr>
         <p:spPr>
           <a:xfrm>
-            <a:off x="2697480" y="1783080"/>
-            <a:ext cx="9174175" cy="4663440"/>
+            <a:off x="5349240" y="1783080"/>
+            <a:ext cx="6522415" cy="4663440"/>
           </a:xfrm>
           <a:prstGeom prst="rect">
             <a:avLst/>
@@ -15221,14 +15307,15 @@
           <a:bodyPr wrap="square" lIns="0" tIns="0" rIns="0" bIns="0" rtlCol="0" anchor="t"/>
           <a:lstStyle/>
           <a:p>
-            <a:pPr algn="l" indent="0" marL="0">
+            <a:pPr algn="l" marL="342900" indent="-342900">
               <a:spcAft>
                 <a:spcPts val="800"/>
               </a:spcAft>
-              <a:buNone/>
+              <a:buSzPct val="100000"/>
+              <a:buChar char="•"/>
             </a:pPr>
             <a:r>
-              <a:rPr lang="en-US" sz="4000" i="1" dirty="0">
+              <a:rPr lang="en-US" sz="4000" b="1" dirty="0">
                 <a:solidFill>
                   <a:srgbClr val="111111"/>
                 </a:solidFill>
@@ -15236,19 +15323,17 @@
                 <a:ea typeface="Times New Roman" pitchFamily="34" charset="-122"/>
                 <a:cs typeface="Times New Roman" pitchFamily="34" charset="-120"/>
               </a:rPr>
-              <a:t>The soils of the Equatorial region have the following characteristics:</a:t>
-            </a:r>
-            <a:endParaRPr lang="en-US" sz="4000" dirty="0"/>
-          </a:p>
-          <a:p>
-            <a:pPr algn="l" indent="0" marL="0">
+              <a:t>Leached: </a:t>
+            </a:r>
+            <a:pPr algn="l" marL="342900" indent="-342900">
               <a:spcAft>
                 <a:spcPts val="800"/>
               </a:spcAft>
-              <a:buNone/>
+              <a:buSzPct val="100000"/>
+              <a:buChar char="•"/>
             </a:pPr>
             <a:r>
-              <a:rPr lang="en-US" sz="4000" b="1" dirty="0">
+              <a:rPr lang="en-US" sz="4000" dirty="0">
                 <a:solidFill>
                   <a:srgbClr val="111111"/>
                 </a:solidFill>
@@ -15256,16 +15341,20 @@
                 <a:ea typeface="Times New Roman" pitchFamily="34" charset="-122"/>
                 <a:cs typeface="Times New Roman" pitchFamily="34" charset="-120"/>
               </a:rPr>
-              <a:t>Ferrallitic soils: </a:t>
-            </a:r>
-            <a:pPr algn="l" indent="0" marL="0">
+              <a:t>Heavy rain washes the plant food away.</a:t>
+            </a:r>
+            <a:endParaRPr lang="en-US" sz="4000" dirty="0"/>
+          </a:p>
+          <a:p>
+            <a:pPr algn="l" marL="342900" indent="-342900">
               <a:spcAft>
                 <a:spcPts val="800"/>
               </a:spcAft>
-              <a:buNone/>
+              <a:buSzPct val="100000"/>
+              <a:buChar char="•"/>
             </a:pPr>
             <a:r>
-              <a:rPr lang="en-US" sz="4000" dirty="0">
+              <a:rPr lang="en-US" sz="4000" b="1" dirty="0">
                 <a:solidFill>
                   <a:srgbClr val="111111"/>
                 </a:solidFill>
@@ -15273,19 +15362,17 @@
                 <a:ea typeface="Times New Roman" pitchFamily="34" charset="-122"/>
                 <a:cs typeface="Times New Roman" pitchFamily="34" charset="-120"/>
               </a:rPr>
-              <a:t>The soils are red or yellow because they contain iron.</a:t>
-            </a:r>
-            <a:endParaRPr lang="en-US" sz="4000" dirty="0"/>
-          </a:p>
-          <a:p>
-            <a:pPr algn="l" indent="0" marL="0">
+              <a:t>Thin humus: </a:t>
+            </a:r>
+            <a:pPr algn="l" marL="342900" indent="-342900">
               <a:spcAft>
                 <a:spcPts val="800"/>
               </a:spcAft>
-              <a:buNone/>
+              <a:buSzPct val="100000"/>
+              <a:buChar char="•"/>
             </a:pPr>
             <a:r>
-              <a:rPr lang="en-US" sz="4000" b="1" dirty="0">
+              <a:rPr lang="en-US" sz="4000" dirty="0">
                 <a:solidFill>
                   <a:srgbClr val="111111"/>
                 </a:solidFill>
@@ -15293,16 +15380,20 @@
                 <a:ea typeface="Times New Roman" pitchFamily="34" charset="-122"/>
                 <a:cs typeface="Times New Roman" pitchFamily="34" charset="-120"/>
               </a:rPr>
-              <a:t>Leached soils: </a:t>
-            </a:r>
-            <a:pPr algn="l" indent="0" marL="0">
+              <a:t>Dead leaves rot quickly.</a:t>
+            </a:r>
+            <a:endParaRPr lang="en-US" sz="4000" dirty="0"/>
+          </a:p>
+          <a:p>
+            <a:pPr algn="l" marL="342900" indent="-342900">
               <a:spcAft>
                 <a:spcPts val="800"/>
               </a:spcAft>
-              <a:buNone/>
+              <a:buSzPct val="100000"/>
+              <a:buChar char="•"/>
             </a:pPr>
             <a:r>
-              <a:rPr lang="en-US" sz="4000" dirty="0">
+              <a:rPr lang="en-US" sz="4000" b="1" dirty="0">
                 <a:solidFill>
                   <a:srgbClr val="111111"/>
                 </a:solidFill>
@@ -15310,7 +15401,25 @@
                 <a:ea typeface="Times New Roman" pitchFamily="34" charset="-122"/>
                 <a:cs typeface="Times New Roman" pitchFamily="34" charset="-120"/>
               </a:rPr>
-              <a:t>Heavy rain washes the plant food deep into the soil.</a:t>
+              <a:t>Poor after clearing: </a:t>
+            </a:r>
+            <a:pPr algn="l" marL="342900" indent="-342900">
+              <a:spcAft>
+                <a:spcPts val="800"/>
+              </a:spcAft>
+              <a:buSzPct val="100000"/>
+              <a:buChar char="•"/>
+            </a:pPr>
+            <a:r>
+              <a:rPr lang="en-US" sz="4000" dirty="0">
+                <a:solidFill>
+                  <a:srgbClr val="111111"/>
+                </a:solidFill>
+                <a:latin typeface="Times New Roman" pitchFamily="34" charset="0"/>
+                <a:ea typeface="Times New Roman" pitchFamily="34" charset="-122"/>
+                <a:cs typeface="Times New Roman" pitchFamily="34" charset="-120"/>
+              </a:rPr>
+              <a:t>The soil becomes poor after a few years of farming.</a:t>
             </a:r>
             <a:endParaRPr lang="en-US" sz="4000" dirty="0"/>
           </a:p>
@@ -15422,7 +15531,7 @@
                 <a:ea typeface="Calibri" pitchFamily="34" charset="-122"/>
                 <a:cs typeface="Calibri" pitchFamily="34" charset="-120"/>
               </a:rPr>
-              <a:t>BOARD SUMMARY</a:t>
+              <a:t>FORMATIVE EVALUATION</a:t>
             </a:r>
             <a:endParaRPr lang="en-US" sz="1400" dirty="0"/>
           </a:p>
@@ -15487,7 +15596,7 @@
                 <a:ea typeface="Times New Roman" pitchFamily="34" charset="-122"/>
                 <a:cs typeface="Times New Roman" pitchFamily="34" charset="-120"/>
               </a:rPr>
-              <a:t>2. Soils (continued)</a:t>
+              <a:t>Evaluation 1</a:t>
             </a:r>
             <a:endParaRPr lang="en-US" sz="3600" dirty="0"/>
           </a:p>
@@ -15521,7 +15630,7 @@
               <a:buNone/>
             </a:pPr>
             <a:r>
-              <a:rPr lang="en-US" sz="4000" b="1" dirty="0">
+              <a:rPr lang="en-US" sz="4000" dirty="0">
                 <a:solidFill>
                   <a:srgbClr val="111111"/>
                 </a:solidFill>
@@ -15529,61 +15638,7 @@
                 <a:ea typeface="Times New Roman" pitchFamily="34" charset="-122"/>
                 <a:cs typeface="Times New Roman" pitchFamily="34" charset="-120"/>
               </a:rPr>
-              <a:t>Thin humus: </a:t>
-            </a:r>
-            <a:pPr algn="l" indent="0" marL="0">
-              <a:spcAft>
-                <a:spcPts val="800"/>
-              </a:spcAft>
-              <a:buNone/>
-            </a:pPr>
-            <a:r>
-              <a:rPr lang="en-US" sz="4000" dirty="0">
-                <a:solidFill>
-                  <a:srgbClr val="111111"/>
-                </a:solidFill>
-                <a:latin typeface="Times New Roman" pitchFamily="34" charset="0"/>
-                <a:ea typeface="Times New Roman" pitchFamily="34" charset="-122"/>
-                <a:cs typeface="Times New Roman" pitchFamily="34" charset="-120"/>
-              </a:rPr>
-              <a:t>Dead leaves rot quickly, so the layer of humus is thin.</a:t>
-            </a:r>
-            <a:endParaRPr lang="en-US" sz="4000" dirty="0"/>
-          </a:p>
-          <a:p>
-            <a:pPr algn="l" indent="0" marL="0">
-              <a:spcAft>
-                <a:spcPts val="800"/>
-              </a:spcAft>
-              <a:buNone/>
-            </a:pPr>
-            <a:r>
-              <a:rPr lang="en-US" sz="4000" b="1" dirty="0">
-                <a:solidFill>
-                  <a:srgbClr val="111111"/>
-                </a:solidFill>
-                <a:latin typeface="Times New Roman" pitchFamily="34" charset="0"/>
-                <a:ea typeface="Times New Roman" pitchFamily="34" charset="-122"/>
-                <a:cs typeface="Times New Roman" pitchFamily="34" charset="-120"/>
-              </a:rPr>
-              <a:t>Poor after clearing: </a:t>
-            </a:r>
-            <a:pPr algn="l" indent="0" marL="0">
-              <a:spcAft>
-                <a:spcPts val="800"/>
-              </a:spcAft>
-              <a:buNone/>
-            </a:pPr>
-            <a:r>
-              <a:rPr lang="en-US" sz="4000" dirty="0">
-                <a:solidFill>
-                  <a:srgbClr val="111111"/>
-                </a:solidFill>
-                <a:latin typeface="Times New Roman" pitchFamily="34" charset="0"/>
-                <a:ea typeface="Times New Roman" pitchFamily="34" charset="-122"/>
-                <a:cs typeface="Times New Roman" pitchFamily="34" charset="-120"/>
-              </a:rPr>
-              <a:t>When the forest is cleared, the soil becomes poor after a few years of farming.</a:t>
+              <a:t>Give two characteristics of the equatorial forest.</a:t>
             </a:r>
             <a:endParaRPr lang="en-US" sz="4000" dirty="0"/>
           </a:p>
@@ -15760,7 +15815,7 @@
                 <a:ea typeface="Times New Roman" pitchFamily="34" charset="-122"/>
                 <a:cs typeface="Times New Roman" pitchFamily="34" charset="-120"/>
               </a:rPr>
-              <a:t>Evaluation 1</a:t>
+              <a:t>Expected Answer</a:t>
             </a:r>
             <a:endParaRPr lang="en-US" sz="3600" dirty="0"/>
           </a:p>
@@ -15802,7 +15857,7 @@
                 <a:ea typeface="Times New Roman" pitchFamily="34" charset="-122"/>
                 <a:cs typeface="Times New Roman" pitchFamily="34" charset="-120"/>
               </a:rPr>
-              <a:t>Give two characteristics of the equatorial forest.</a:t>
+              <a:t>It is evergreen and it has several layers of tall trees (also hardwoods, climbers).</a:t>
             </a:r>
             <a:endParaRPr lang="en-US" sz="4000" dirty="0"/>
           </a:p>
@@ -15979,7 +16034,7 @@
                 <a:ea typeface="Times New Roman" pitchFamily="34" charset="-122"/>
                 <a:cs typeface="Times New Roman" pitchFamily="34" charset="-120"/>
               </a:rPr>
-              <a:t>Expected Answer</a:t>
+              <a:t>Evaluation 2</a:t>
             </a:r>
             <a:endParaRPr lang="en-US" sz="3600" dirty="0"/>
           </a:p>
@@ -16021,7 +16076,7 @@
                 <a:ea typeface="Times New Roman" pitchFamily="34" charset="-122"/>
                 <a:cs typeface="Times New Roman" pitchFamily="34" charset="-120"/>
               </a:rPr>
-              <a:t>It is evergreen and it has several layers of tall trees (also hardwoods, climbers).</a:t>
+              <a:t>Why are equatorial soils poor when the forest is cleared?</a:t>
             </a:r>
             <a:endParaRPr lang="en-US" sz="4000" dirty="0"/>
           </a:p>
@@ -16198,7 +16253,7 @@
                 <a:ea typeface="Times New Roman" pitchFamily="34" charset="-122"/>
                 <a:cs typeface="Times New Roman" pitchFamily="34" charset="-120"/>
               </a:rPr>
-              <a:t>Evaluation 2</a:t>
+              <a:t>Expected Answer</a:t>
             </a:r>
             <a:endParaRPr lang="en-US" sz="3600" dirty="0"/>
           </a:p>
@@ -16240,7 +16295,7 @@
                 <a:ea typeface="Times New Roman" pitchFamily="34" charset="-122"/>
                 <a:cs typeface="Times New Roman" pitchFamily="34" charset="-120"/>
               </a:rPr>
-              <a:t>Why are equatorial soils poor when the forest is cleared?</a:t>
+              <a:t>Heavy rain washes the plant food out of the soil (leaching) and the thin humus is quickly used up.</a:t>
             </a:r>
             <a:endParaRPr lang="en-US" sz="4000" dirty="0"/>
           </a:p>
@@ -16352,7 +16407,7 @@
                 <a:ea typeface="Calibri" pitchFamily="34" charset="-122"/>
                 <a:cs typeface="Calibri" pitchFamily="34" charset="-120"/>
               </a:rPr>
-              <a:t>FORMATIVE EVALUATION</a:t>
+              <a:t>REMEDIATION</a:t>
             </a:r>
             <a:endParaRPr lang="en-US" sz="1400" dirty="0"/>
           </a:p>
@@ -16375,7 +16430,7 @@
         <p:spPr>
           <a:xfrm>
             <a:off x="0" y="658368"/>
-            <a:ext cx="5120640" cy="5833872"/>
+            <a:ext cx="1463040" cy="5833872"/>
           </a:xfrm>
           <a:prstGeom prst="rect">
             <a:avLst/>
@@ -16390,8 +16445,8 @@
         </p:nvSpPr>
         <p:spPr>
           <a:xfrm>
-            <a:off x="5349240" y="1005840"/>
-            <a:ext cx="6522415" cy="731520"/>
+            <a:off x="1691640" y="1005840"/>
+            <a:ext cx="10180015" cy="731520"/>
           </a:xfrm>
           <a:prstGeom prst="rect">
             <a:avLst/>
@@ -16417,7 +16472,7 @@
                 <a:ea typeface="Times New Roman" pitchFamily="34" charset="-122"/>
                 <a:cs typeface="Times New Roman" pitchFamily="34" charset="-120"/>
               </a:rPr>
-              <a:t>Expected Answer</a:t>
+              <a:t>Remediation</a:t>
             </a:r>
             <a:endParaRPr lang="en-US" sz="3600" dirty="0"/>
           </a:p>
@@ -16431,8 +16486,8 @@
         </p:nvSpPr>
         <p:spPr>
           <a:xfrm>
-            <a:off x="5349240" y="1783080"/>
-            <a:ext cx="6522415" cy="4663440"/>
+            <a:off x="1691640" y="1783080"/>
+            <a:ext cx="10180015" cy="4663440"/>
           </a:xfrm>
           <a:prstGeom prst="rect">
             <a:avLst/>
@@ -16451,7 +16506,7 @@
               <a:buNone/>
             </a:pPr>
             <a:r>
-              <a:rPr lang="en-US" sz="4000" dirty="0">
+              <a:rPr lang="en-US" sz="4000" b="1" dirty="0">
                 <a:solidFill>
                   <a:srgbClr val="111111"/>
                 </a:solidFill>
@@ -16459,7 +16514,73 @@
                 <a:ea typeface="Times New Roman" pitchFamily="34" charset="-122"/>
                 <a:cs typeface="Times New Roman" pitchFamily="34" charset="-120"/>
               </a:rPr>
-              <a:t>Heavy rain washes the plant food out of the soil (leaching) and the thin humus is quickly used up.</a:t>
+              <a:t>Fill in the blanks:</a:t>
+            </a:r>
+            <a:endParaRPr lang="en-US" sz="4000" dirty="0"/>
+          </a:p>
+          <a:p>
+            <a:pPr algn="l" marL="342900" indent="-342900">
+              <a:spcAft>
+                <a:spcPts val="800"/>
+              </a:spcAft>
+              <a:buSzPct val="100000"/>
+              <a:buFont typeface="+mj-lt"/>
+              <a:buAutoNum type="arabicPeriod" startAt="1"/>
+            </a:pPr>
+            <a:r>
+              <a:rPr lang="en-US" sz="4000" dirty="0">
+                <a:solidFill>
+                  <a:srgbClr val="111111"/>
+                </a:solidFill>
+                <a:latin typeface="Times New Roman" pitchFamily="34" charset="0"/>
+                <a:ea typeface="Times New Roman" pitchFamily="34" charset="-122"/>
+                <a:cs typeface="Times New Roman" pitchFamily="34" charset="-120"/>
+              </a:rPr>
+              <a:t>A forest that is green all year is ______.</a:t>
+            </a:r>
+            <a:endParaRPr lang="en-US" sz="4000" dirty="0"/>
+          </a:p>
+          <a:p>
+            <a:pPr algn="l" marL="342900" indent="-342900">
+              <a:spcAft>
+                <a:spcPts val="800"/>
+              </a:spcAft>
+              <a:buSzPct val="100000"/>
+              <a:buFont typeface="+mj-lt"/>
+              <a:buAutoNum type="arabicPeriod" startAt="1"/>
+            </a:pPr>
+            <a:r>
+              <a:rPr lang="en-US" sz="4000" dirty="0">
+                <a:solidFill>
+                  <a:srgbClr val="111111"/>
+                </a:solidFill>
+                <a:latin typeface="Times New Roman" pitchFamily="34" charset="0"/>
+                <a:ea typeface="Times New Roman" pitchFamily="34" charset="-122"/>
+                <a:cs typeface="Times New Roman" pitchFamily="34" charset="-120"/>
+              </a:rPr>
+              <a:t>The layer of tree tops about 30 m high is the ______.</a:t>
+            </a:r>
+            <a:endParaRPr lang="en-US" sz="4000" dirty="0"/>
+          </a:p>
+          <a:p>
+            <a:pPr algn="l" marL="342900" indent="-342900">
+              <a:spcAft>
+                <a:spcPts val="800"/>
+              </a:spcAft>
+              <a:buSzPct val="100000"/>
+              <a:buFont typeface="+mj-lt"/>
+              <a:buAutoNum type="arabicPeriod" startAt="1"/>
+            </a:pPr>
+            <a:r>
+              <a:rPr lang="en-US" sz="4000" dirty="0">
+                <a:solidFill>
+                  <a:srgbClr val="111111"/>
+                </a:solidFill>
+                <a:latin typeface="Times New Roman" pitchFamily="34" charset="0"/>
+                <a:ea typeface="Times New Roman" pitchFamily="34" charset="-122"/>
+                <a:cs typeface="Times New Roman" pitchFamily="34" charset="-120"/>
+              </a:rPr>
+              <a:t>The washing of plant food deep into the soil is ______.</a:t>
             </a:r>
             <a:endParaRPr lang="en-US" sz="4000" dirty="0"/>
           </a:p>
@@ -16571,7 +16692,7 @@
                 <a:ea typeface="Calibri" pitchFamily="34" charset="-122"/>
                 <a:cs typeface="Calibri" pitchFamily="34" charset="-120"/>
               </a:rPr>
-              <a:t>REMEDIATION</a:t>
+              <a:t>HOMEWORK</a:t>
             </a:r>
             <a:endParaRPr lang="en-US" sz="1400" dirty="0"/>
           </a:p>
@@ -16594,7 +16715,7 @@
         <p:spPr>
           <a:xfrm>
             <a:off x="0" y="658368"/>
-            <a:ext cx="1463040" cy="5833872"/>
+            <a:ext cx="5120640" cy="5833872"/>
           </a:xfrm>
           <a:prstGeom prst="rect">
             <a:avLst/>
@@ -16609,8 +16730,8 @@
         </p:nvSpPr>
         <p:spPr>
           <a:xfrm>
-            <a:off x="1691640" y="1005840"/>
-            <a:ext cx="10180015" cy="731520"/>
+            <a:off x="5349240" y="1005840"/>
+            <a:ext cx="6522415" cy="731520"/>
           </a:xfrm>
           <a:prstGeom prst="rect">
             <a:avLst/>
@@ -16636,7 +16757,7 @@
                 <a:ea typeface="Times New Roman" pitchFamily="34" charset="-122"/>
                 <a:cs typeface="Times New Roman" pitchFamily="34" charset="-120"/>
               </a:rPr>
-              <a:t>Remediation</a:t>
+              <a:t>Homework</a:t>
             </a:r>
             <a:endParaRPr lang="en-US" sz="3600" dirty="0"/>
           </a:p>
@@ -16650,8 +16771,8 @@
         </p:nvSpPr>
         <p:spPr>
           <a:xfrm>
-            <a:off x="1691640" y="1783080"/>
-            <a:ext cx="10180015" cy="4663440"/>
+            <a:off x="5349240" y="1783080"/>
+            <a:ext cx="6522415" cy="4663440"/>
           </a:xfrm>
           <a:prstGeom prst="rect">
             <a:avLst/>
@@ -16670,7 +16791,7 @@
               <a:buNone/>
             </a:pPr>
             <a:r>
-              <a:rPr lang="en-US" sz="4000" b="1" dirty="0">
+              <a:rPr lang="en-US" sz="4000" dirty="0">
                 <a:solidFill>
                   <a:srgbClr val="111111"/>
                 </a:solidFill>
@@ -16678,73 +16799,7 @@
                 <a:ea typeface="Times New Roman" pitchFamily="34" charset="-122"/>
                 <a:cs typeface="Times New Roman" pitchFamily="34" charset="-120"/>
               </a:rPr>
-              <a:t>Fill in the blanks:</a:t>
-            </a:r>
-            <a:endParaRPr lang="en-US" sz="4000" dirty="0"/>
-          </a:p>
-          <a:p>
-            <a:pPr algn="l" marL="342900" indent="-342900">
-              <a:spcAft>
-                <a:spcPts val="800"/>
-              </a:spcAft>
-              <a:buSzPct val="100000"/>
-              <a:buFont typeface="+mj-lt"/>
-              <a:buAutoNum type="arabicPeriod" startAt="1"/>
-            </a:pPr>
-            <a:r>
-              <a:rPr lang="en-US" sz="4000" dirty="0">
-                <a:solidFill>
-                  <a:srgbClr val="111111"/>
-                </a:solidFill>
-                <a:latin typeface="Times New Roman" pitchFamily="34" charset="0"/>
-                <a:ea typeface="Times New Roman" pitchFamily="34" charset="-122"/>
-                <a:cs typeface="Times New Roman" pitchFamily="34" charset="-120"/>
-              </a:rPr>
-              <a:t>A forest that is green all year is ______.</a:t>
-            </a:r>
-            <a:endParaRPr lang="en-US" sz="4000" dirty="0"/>
-          </a:p>
-          <a:p>
-            <a:pPr algn="l" marL="342900" indent="-342900">
-              <a:spcAft>
-                <a:spcPts val="800"/>
-              </a:spcAft>
-              <a:buSzPct val="100000"/>
-              <a:buFont typeface="+mj-lt"/>
-              <a:buAutoNum type="arabicPeriod" startAt="1"/>
-            </a:pPr>
-            <a:r>
-              <a:rPr lang="en-US" sz="4000" dirty="0">
-                <a:solidFill>
-                  <a:srgbClr val="111111"/>
-                </a:solidFill>
-                <a:latin typeface="Times New Roman" pitchFamily="34" charset="0"/>
-                <a:ea typeface="Times New Roman" pitchFamily="34" charset="-122"/>
-                <a:cs typeface="Times New Roman" pitchFamily="34" charset="-120"/>
-              </a:rPr>
-              <a:t>The layer of tree tops about 30 m high is the ______.</a:t>
-            </a:r>
-            <a:endParaRPr lang="en-US" sz="4000" dirty="0"/>
-          </a:p>
-          <a:p>
-            <a:pPr algn="l" marL="342900" indent="-342900">
-              <a:spcAft>
-                <a:spcPts val="800"/>
-              </a:spcAft>
-              <a:buSzPct val="100000"/>
-              <a:buFont typeface="+mj-lt"/>
-              <a:buAutoNum type="arabicPeriod" startAt="1"/>
-            </a:pPr>
-            <a:r>
-              <a:rPr lang="en-US" sz="4000" dirty="0">
-                <a:solidFill>
-                  <a:srgbClr val="111111"/>
-                </a:solidFill>
-                <a:latin typeface="Times New Roman" pitchFamily="34" charset="0"/>
-                <a:ea typeface="Times New Roman" pitchFamily="34" charset="-122"/>
-                <a:cs typeface="Times New Roman" pitchFamily="34" charset="-120"/>
-              </a:rPr>
-              <a:t>The washing of plant food deep into the soil is ______.</a:t>
+              <a:t>List three products from the forest of southern Cameroon that are sold in the market of Garoua (for example timber, plantains or cocoa products).</a:t>
             </a:r>
             <a:endParaRPr lang="en-US" sz="4000" dirty="0"/>
           </a:p>
@@ -16856,7 +16911,7 @@
                 <a:ea typeface="Calibri" pitchFamily="34" charset="-122"/>
                 <a:cs typeface="Calibri" pitchFamily="34" charset="-120"/>
               </a:rPr>
-              <a:t>HOMEWORK</a:t>
+              <a:t>NEXT LESSON</a:t>
             </a:r>
             <a:endParaRPr lang="en-US" sz="1400" dirty="0"/>
           </a:p>
@@ -16921,7 +16976,7 @@
                 <a:ea typeface="Times New Roman" pitchFamily="34" charset="-122"/>
                 <a:cs typeface="Times New Roman" pitchFamily="34" charset="-120"/>
               </a:rPr>
-              <a:t>Homework</a:t>
+              <a:t>Next Lesson</a:t>
             </a:r>
             <a:endParaRPr lang="en-US" sz="3600" dirty="0"/>
           </a:p>
@@ -16945,17 +17000,17 @@
           <a:ln/>
         </p:spPr>
         <p:txBody>
-          <a:bodyPr wrap="square" lIns="0" tIns="0" rIns="0" bIns="0" rtlCol="0" anchor="t"/>
-          <a:lstStyle/>
-          <a:p>
-            <a:pPr algn="l" indent="0" marL="0">
+          <a:bodyPr wrap="square" lIns="0" tIns="0" rIns="0" bIns="0" rtlCol="0" anchor="ctr"/>
+          <a:lstStyle/>
+          <a:p>
+            <a:pPr algn="ctr" indent="0" marL="0">
               <a:spcAft>
                 <a:spcPts val="800"/>
               </a:spcAft>
               <a:buNone/>
             </a:pPr>
             <a:r>
-              <a:rPr lang="en-US" sz="4000" dirty="0">
+              <a:rPr lang="en-US" sz="4000" b="1" dirty="0">
                 <a:solidFill>
                   <a:srgbClr val="111111"/>
                 </a:solidFill>
@@ -16963,7 +17018,27 @@
                 <a:ea typeface="Times New Roman" pitchFamily="34" charset="-122"/>
                 <a:cs typeface="Times New Roman" pitchFamily="34" charset="-120"/>
               </a:rPr>
-              <a:t>List three products from the forest of southern Cameroon that are sold in the market of Garoua (for example timber, plantains or cocoa products).</a:t>
+              <a:t>Our next lesson will be on:</a:t>
+            </a:r>
+            <a:endParaRPr lang="en-US" sz="4000" dirty="0"/>
+          </a:p>
+          <a:p>
+            <a:pPr algn="ctr" indent="0" marL="0">
+              <a:spcAft>
+                <a:spcPts val="800"/>
+              </a:spcAft>
+              <a:buNone/>
+            </a:pPr>
+            <a:r>
+              <a:rPr lang="en-US" sz="4000" b="1" dirty="0">
+                <a:solidFill>
+                  <a:srgbClr val="990011"/>
+                </a:solidFill>
+                <a:latin typeface="Times New Roman" pitchFamily="34" charset="0"/>
+                <a:ea typeface="Times New Roman" pitchFamily="34" charset="-122"/>
+                <a:cs typeface="Times New Roman" pitchFamily="34" charset="-120"/>
+              </a:rPr>
+              <a:t>Lesson 1 (Part 3): The Equatorial Region: Types of Resources and Methods of Exploitation</a:t>
             </a:r>
             <a:endParaRPr lang="en-US" sz="4000" dirty="0"/>
           </a:p>
@@ -17075,245 +17150,6 @@
                 <a:ea typeface="Calibri" pitchFamily="34" charset="-122"/>
                 <a:cs typeface="Calibri" pitchFamily="34" charset="-120"/>
               </a:rPr>
-              <a:t>NEXT LESSON</a:t>
-            </a:r>
-            <a:endParaRPr lang="en-US" sz="1400" dirty="0"/>
-          </a:p>
-        </p:txBody>
-      </p:sp>
-      <p:pic>
-        <p:nvPicPr>
-          <p:cNvPr id="3" name="Image 0" descr="/home/claude/f4/img/minesec_sheet.png">    </p:cNvPr>
-          <p:cNvPicPr>
-            <a:picLocks noChangeAspect="1"/>
-          </p:cNvPicPr>
-          <p:nvPr/>
-        </p:nvPicPr>
-        <p:blipFill>
-          <a:blip r:embed="rId1"/>
-          <a:stretch>
-            <a:fillRect/>
-          </a:stretch>
-        </p:blipFill>
-        <p:spPr>
-          <a:xfrm>
-            <a:off x="0" y="658368"/>
-            <a:ext cx="5120640" cy="5833872"/>
-          </a:xfrm>
-          <a:prstGeom prst="rect">
-            <a:avLst/>
-          </a:prstGeom>
-        </p:spPr>
-      </p:pic>
-      <p:sp>
-        <p:nvSpPr>
-          <p:cNvPr id="4" name="Text 1"/>
-          <p:cNvSpPr/>
-          <p:nvPr/>
-        </p:nvSpPr>
-        <p:spPr>
-          <a:xfrm>
-            <a:off x="5349240" y="1005840"/>
-            <a:ext cx="6522415" cy="731520"/>
-          </a:xfrm>
-          <a:prstGeom prst="rect">
-            <a:avLst/>
-          </a:prstGeom>
-          <a:noFill/>
-          <a:ln/>
-        </p:spPr>
-        <p:txBody>
-          <a:bodyPr wrap="square" lIns="0" tIns="0" rIns="0" bIns="0" rtlCol="0" anchor="ctr">
-            <a:normAutofit/>
-          </a:bodyPr>
-          <a:lstStyle/>
-          <a:p>
-            <a:pPr algn="ctr" indent="0" marL="0">
-              <a:buNone/>
-            </a:pPr>
-            <a:r>
-              <a:rPr lang="en-US" sz="3600" b="1" dirty="0">
-                <a:solidFill>
-                  <a:srgbClr val="990011"/>
-                </a:solidFill>
-                <a:latin typeface="Times New Roman" pitchFamily="34" charset="0"/>
-                <a:ea typeface="Times New Roman" pitchFamily="34" charset="-122"/>
-                <a:cs typeface="Times New Roman" pitchFamily="34" charset="-120"/>
-              </a:rPr>
-              <a:t>Next Lesson</a:t>
-            </a:r>
-            <a:endParaRPr lang="en-US" sz="3600" dirty="0"/>
-          </a:p>
-        </p:txBody>
-      </p:sp>
-      <p:sp>
-        <p:nvSpPr>
-          <p:cNvPr id="5" name="Text 2"/>
-          <p:cNvSpPr/>
-          <p:nvPr/>
-        </p:nvSpPr>
-        <p:spPr>
-          <a:xfrm>
-            <a:off x="5349240" y="1783080"/>
-            <a:ext cx="6522415" cy="4663440"/>
-          </a:xfrm>
-          <a:prstGeom prst="rect">
-            <a:avLst/>
-          </a:prstGeom>
-          <a:noFill/>
-          <a:ln/>
-        </p:spPr>
-        <p:txBody>
-          <a:bodyPr wrap="square" lIns="0" tIns="0" rIns="0" bIns="0" rtlCol="0" anchor="ctr"/>
-          <a:lstStyle/>
-          <a:p>
-            <a:pPr algn="ctr" indent="0" marL="0">
-              <a:spcAft>
-                <a:spcPts val="800"/>
-              </a:spcAft>
-              <a:buNone/>
-            </a:pPr>
-            <a:r>
-              <a:rPr lang="en-US" sz="4000" b="1" dirty="0">
-                <a:solidFill>
-                  <a:srgbClr val="111111"/>
-                </a:solidFill>
-                <a:latin typeface="Times New Roman" pitchFamily="34" charset="0"/>
-                <a:ea typeface="Times New Roman" pitchFamily="34" charset="-122"/>
-                <a:cs typeface="Times New Roman" pitchFamily="34" charset="-120"/>
-              </a:rPr>
-              <a:t>Our next lesson will be on:</a:t>
-            </a:r>
-            <a:endParaRPr lang="en-US" sz="4000" dirty="0"/>
-          </a:p>
-          <a:p>
-            <a:pPr algn="ctr" indent="0" marL="0">
-              <a:spcAft>
-                <a:spcPts val="800"/>
-              </a:spcAft>
-              <a:buNone/>
-            </a:pPr>
-            <a:r>
-              <a:rPr lang="en-US" sz="4000" b="1" dirty="0">
-                <a:solidFill>
-                  <a:srgbClr val="990011"/>
-                </a:solidFill>
-                <a:latin typeface="Times New Roman" pitchFamily="34" charset="0"/>
-                <a:ea typeface="Times New Roman" pitchFamily="34" charset="-122"/>
-                <a:cs typeface="Times New Roman" pitchFamily="34" charset="-120"/>
-              </a:rPr>
-              <a:t>Lesson 1 (Part 3): The Equatorial Region: Types of Resources and Methods of Exploitation</a:t>
-            </a:r>
-            <a:endParaRPr lang="en-US" sz="4000" dirty="0"/>
-          </a:p>
-        </p:txBody>
-      </p:sp>
-      <p:sp>
-        <p:nvSpPr>
-          <p:cNvPr id="25" name="Slide Number Placeholder 0"/>
-          <p:cNvSpPr>
-            <a:spLocks noGrp="1"/>
-          </p:cNvSpPr>
-          <p:nvPr>
-            <p:ph type="sldNum" sz="quarter" idx="4294967295"/>
-          </p:nvPr>
-        </p:nvSpPr>
-        <p:spPr>
-          <a:xfrm>
-            <a:off x="27432" y="91440"/>
-            <a:ext cx="585216" cy="475488"/>
-          </a:xfrm>
-          <a:prstGeom prst="rect">
-            <a:avLst/>
-          </a:prstGeom>
-          <a:extLst>
-            <a:ext uri="{C572A759-6A51-4108-AA02-DFA0A04FC94B}">
-              <ma14:wrappingTextBoxFlag xmlns:ma14="http://schemas.microsoft.com/office/mac/drawingml/2011/main" val="0"/>
-            </a:ext>
-          </a:extLst>
-        </p:spPr>
-        <p:txBody>
-          <a:bodyPr/>
-          <a:lstStyle>
-            <a:lvl1pPr>
-              <a:defRPr sz="2000">
-                <a:solidFill>
-                  <a:srgbClr val="FFFFFF"/>
-                </a:solidFill>
-                <a:latin typeface="Calibri"/>
-                <a:ea typeface="Calibri"/>
-                <a:cs typeface="Calibri"/>
-              </a:defRPr>
-            </a:lvl1pPr>
-          </a:lstStyle>
-          <a:p>
-            <a:pPr algn="ctr"/>
-            <a:fld id="{F7021451-1387-4CA6-816F-3879F97B5CBC}" type="slidenum">
-              <a:rPr b="1" lang="en-US"/>
-              <a:t>48</a:t>
-            </a:fld>
-            <a:endParaRPr lang="en-US"/>
-          </a:p>
-        </p:txBody>
-      </p:sp>
-    </p:spTree>
-  </p:cSld>
-  <p:clrMapOvr>
-    <a:masterClrMapping/>
-  </p:clrMapOvr>
-</p:sld>
-</file>
-
-<file path=ppt/slides/slide49.xml><?xml version="1.0" encoding="utf-8"?>
-<p:sld xmlns:a="http://schemas.openxmlformats.org/drawingml/2006/main" xmlns:r="http://schemas.openxmlformats.org/officeDocument/2006/relationships" xmlns:p="http://schemas.openxmlformats.org/presentationml/2006/main">
-  <p:cSld name="Slide 49">
-    <p:spTree>
-      <p:nvGrpSpPr>
-        <p:cNvPr id="1" name=""/>
-        <p:cNvGrpSpPr/>
-        <p:nvPr/>
-      </p:nvGrpSpPr>
-      <p:grpSpPr>
-        <a:xfrm>
-          <a:off x="0" y="0"/>
-          <a:ext cx="0" cy="0"/>
-          <a:chOff x="0" y="0"/>
-          <a:chExt cx="0" cy="0"/>
-        </a:xfrm>
-      </p:grpSpPr>
-      <p:sp>
-        <p:nvSpPr>
-          <p:cNvPr id="2" name="Text 0"/>
-          <p:cNvSpPr/>
-          <p:nvPr/>
-        </p:nvSpPr>
-        <p:spPr>
-          <a:xfrm>
-            <a:off x="457200" y="713232"/>
-            <a:ext cx="11368735" cy="274320"/>
-          </a:xfrm>
-          <a:prstGeom prst="rect">
-            <a:avLst/>
-          </a:prstGeom>
-          <a:noFill/>
-          <a:ln/>
-        </p:spPr>
-        <p:txBody>
-          <a:bodyPr wrap="square" lIns="0" tIns="0" rIns="0" bIns="0" rtlCol="0" anchor="ctr"/>
-          <a:lstStyle/>
-          <a:p>
-            <a:pPr algn="r" indent="0" marL="0">
-              <a:buNone/>
-            </a:pPr>
-            <a:r>
-              <a:rPr lang="en-US" sz="1400" b="1" dirty="0">
-                <a:solidFill>
-                  <a:srgbClr val="1C3F6E"/>
-                </a:solidFill>
-                <a:latin typeface="Calibri" pitchFamily="34" charset="0"/>
-                <a:ea typeface="Calibri" pitchFamily="34" charset="-122"/>
-                <a:cs typeface="Calibri" pitchFamily="34" charset="-120"/>
-              </a:rPr>
               <a:t>BILINGUAL GAME</a:t>
             </a:r>
             <a:endParaRPr lang="en-US" sz="1400" dirty="0"/>
@@ -17361,7 +17197,7 @@
       </p:sp>
       <p:graphicFrame>
         <p:nvGraphicFramePr>
-          <p:cNvPr id="50" name="Table 0"/>
+          <p:cNvPr id="49" name="Table 0"/>
           <p:cNvGraphicFramePr>
             <a:graphicFrameLocks noGrp="1"/>
           </p:cNvGraphicFramePr>
@@ -18397,7 +18233,7 @@
             <a:pPr algn="ctr"/>
             <a:fld id="{F7021451-1387-4CA6-816F-3879F97B5CBC}" type="slidenum">
               <a:rPr b="1" lang="en-US"/>
-              <a:t>49</a:t>
+              <a:t>48</a:t>
             </a:fld>
             <a:endParaRPr lang="en-US"/>
           </a:p>
@@ -18411,9 +18247,9 @@
 </p:sld>
 </file>
 
-<file path=ppt/slides/slide5.xml><?xml version="1.0" encoding="utf-8"?>
+<file path=ppt/slides/slide49.xml><?xml version="1.0" encoding="utf-8"?>
 <p:sld xmlns:a="http://schemas.openxmlformats.org/drawingml/2006/main" xmlns:r="http://schemas.openxmlformats.org/officeDocument/2006/relationships" xmlns:p="http://schemas.openxmlformats.org/presentationml/2006/main">
-  <p:cSld name="Slide 5">
+  <p:cSld name="Slide 49">
     <p:spTree>
       <p:nvGrpSpPr>
         <p:cNvPr id="1" name=""/>
@@ -18461,225 +18297,6 @@
                 <a:ea typeface="Calibri" pitchFamily="34" charset="-122"/>
                 <a:cs typeface="Calibri" pitchFamily="34" charset="-120"/>
               </a:rPr>
-              <a:t>HOMEWORK CORRECTION</a:t>
-            </a:r>
-            <a:endParaRPr lang="en-US" sz="1400" dirty="0"/>
-          </a:p>
-        </p:txBody>
-      </p:sp>
-      <p:pic>
-        <p:nvPicPr>
-          <p:cNvPr id="3" name="Image 0" descr="/home/claude/f4/img/minesec_sheet.png">    </p:cNvPr>
-          <p:cNvPicPr>
-            <a:picLocks noChangeAspect="1"/>
-          </p:cNvPicPr>
-          <p:nvPr/>
-        </p:nvPicPr>
-        <p:blipFill>
-          <a:blip r:embed="rId1"/>
-          <a:stretch>
-            <a:fillRect/>
-          </a:stretch>
-        </p:blipFill>
-        <p:spPr>
-          <a:xfrm>
-            <a:off x="0" y="658368"/>
-            <a:ext cx="5120640" cy="5833872"/>
-          </a:xfrm>
-          <a:prstGeom prst="rect">
-            <a:avLst/>
-          </a:prstGeom>
-        </p:spPr>
-      </p:pic>
-      <p:sp>
-        <p:nvSpPr>
-          <p:cNvPr id="4" name="Text 1"/>
-          <p:cNvSpPr/>
-          <p:nvPr/>
-        </p:nvSpPr>
-        <p:spPr>
-          <a:xfrm>
-            <a:off x="5349240" y="1005840"/>
-            <a:ext cx="6522415" cy="731520"/>
-          </a:xfrm>
-          <a:prstGeom prst="rect">
-            <a:avLst/>
-          </a:prstGeom>
-          <a:noFill/>
-          <a:ln/>
-        </p:spPr>
-        <p:txBody>
-          <a:bodyPr wrap="square" lIns="0" tIns="0" rIns="0" bIns="0" rtlCol="0" anchor="ctr">
-            <a:normAutofit/>
-          </a:bodyPr>
-          <a:lstStyle/>
-          <a:p>
-            <a:pPr algn="ctr" indent="0" marL="0">
-              <a:buNone/>
-            </a:pPr>
-            <a:r>
-              <a:rPr lang="en-US" sz="3600" b="1" dirty="0">
-                <a:solidFill>
-                  <a:srgbClr val="990011"/>
-                </a:solidFill>
-                <a:latin typeface="Times New Roman" pitchFamily="34" charset="0"/>
-                <a:ea typeface="Times New Roman" pitchFamily="34" charset="-122"/>
-                <a:cs typeface="Times New Roman" pitchFamily="34" charset="-120"/>
-              </a:rPr>
-              <a:t>Correction: Possible Answer</a:t>
-            </a:r>
-            <a:endParaRPr lang="en-US" sz="3600" dirty="0"/>
-          </a:p>
-        </p:txBody>
-      </p:sp>
-      <p:sp>
-        <p:nvSpPr>
-          <p:cNvPr id="5" name="Text 2"/>
-          <p:cNvSpPr/>
-          <p:nvPr/>
-        </p:nvSpPr>
-        <p:spPr>
-          <a:xfrm>
-            <a:off x="5349240" y="1783080"/>
-            <a:ext cx="6522415" cy="4663440"/>
-          </a:xfrm>
-          <a:prstGeom prst="rect">
-            <a:avLst/>
-          </a:prstGeom>
-          <a:noFill/>
-          <a:ln/>
-        </p:spPr>
-        <p:txBody>
-          <a:bodyPr wrap="square" lIns="0" tIns="0" rIns="0" bIns="0" rtlCol="0" anchor="t"/>
-          <a:lstStyle/>
-          <a:p>
-            <a:pPr algn="l" indent="0" marL="0">
-              <a:spcAft>
-                <a:spcPts val="800"/>
-              </a:spcAft>
-              <a:buNone/>
-            </a:pPr>
-            <a:r>
-              <a:rPr lang="en-US" sz="4000" dirty="0">
-                <a:solidFill>
-                  <a:srgbClr val="111111"/>
-                </a:solidFill>
-                <a:latin typeface="Times New Roman" pitchFamily="34" charset="0"/>
-                <a:ea typeface="Times New Roman" pitchFamily="34" charset="-122"/>
-                <a:cs typeface="Times New Roman" pitchFamily="34" charset="-120"/>
-              </a:rPr>
-              <a:t>Examples: very tall trees growing close together; green leaves all year; many climbing plants; plantains, cocoa and oil palms around the houses.</a:t>
-            </a:r>
-            <a:endParaRPr lang="en-US" sz="4000" dirty="0"/>
-          </a:p>
-        </p:txBody>
-      </p:sp>
-      <p:sp>
-        <p:nvSpPr>
-          <p:cNvPr id="25" name="Slide Number Placeholder 0"/>
-          <p:cNvSpPr>
-            <a:spLocks noGrp="1"/>
-          </p:cNvSpPr>
-          <p:nvPr>
-            <p:ph type="sldNum" sz="quarter" idx="4294967295"/>
-          </p:nvPr>
-        </p:nvSpPr>
-        <p:spPr>
-          <a:xfrm>
-            <a:off x="27432" y="91440"/>
-            <a:ext cx="585216" cy="475488"/>
-          </a:xfrm>
-          <a:prstGeom prst="rect">
-            <a:avLst/>
-          </a:prstGeom>
-          <a:extLst>
-            <a:ext uri="{C572A759-6A51-4108-AA02-DFA0A04FC94B}">
-              <ma14:wrappingTextBoxFlag xmlns:ma14="http://schemas.microsoft.com/office/mac/drawingml/2011/main" val="0"/>
-            </a:ext>
-          </a:extLst>
-        </p:spPr>
-        <p:txBody>
-          <a:bodyPr/>
-          <a:lstStyle>
-            <a:lvl1pPr>
-              <a:defRPr sz="2000">
-                <a:solidFill>
-                  <a:srgbClr val="FFFFFF"/>
-                </a:solidFill>
-                <a:latin typeface="Calibri"/>
-                <a:ea typeface="Calibri"/>
-                <a:cs typeface="Calibri"/>
-              </a:defRPr>
-            </a:lvl1pPr>
-          </a:lstStyle>
-          <a:p>
-            <a:pPr algn="ctr"/>
-            <a:fld id="{F7021451-1387-4CA6-816F-3879F97B5CBC}" type="slidenum">
-              <a:rPr b="1" lang="en-US"/>
-              <a:t>5</a:t>
-            </a:fld>
-            <a:endParaRPr lang="en-US"/>
-          </a:p>
-        </p:txBody>
-      </p:sp>
-    </p:spTree>
-  </p:cSld>
-  <p:clrMapOvr>
-    <a:masterClrMapping/>
-  </p:clrMapOvr>
-</p:sld>
-</file>
-
-<file path=ppt/slides/slide50.xml><?xml version="1.0" encoding="utf-8"?>
-<p:sld xmlns:a="http://schemas.openxmlformats.org/drawingml/2006/main" xmlns:r="http://schemas.openxmlformats.org/officeDocument/2006/relationships" xmlns:p="http://schemas.openxmlformats.org/presentationml/2006/main">
-  <p:cSld name="Slide 50">
-    <p:spTree>
-      <p:nvGrpSpPr>
-        <p:cNvPr id="1" name=""/>
-        <p:cNvGrpSpPr/>
-        <p:nvPr/>
-      </p:nvGrpSpPr>
-      <p:grpSpPr>
-        <a:xfrm>
-          <a:off x="0" y="0"/>
-          <a:ext cx="0" cy="0"/>
-          <a:chOff x="0" y="0"/>
-          <a:chExt cx="0" cy="0"/>
-        </a:xfrm>
-      </p:grpSpPr>
-      <p:sp>
-        <p:nvSpPr>
-          <p:cNvPr id="2" name="Text 0"/>
-          <p:cNvSpPr/>
-          <p:nvPr/>
-        </p:nvSpPr>
-        <p:spPr>
-          <a:xfrm>
-            <a:off x="457200" y="713232"/>
-            <a:ext cx="11368735" cy="274320"/>
-          </a:xfrm>
-          <a:prstGeom prst="rect">
-            <a:avLst/>
-          </a:prstGeom>
-          <a:noFill/>
-          <a:ln/>
-        </p:spPr>
-        <p:txBody>
-          <a:bodyPr wrap="square" lIns="0" tIns="0" rIns="0" bIns="0" rtlCol="0" anchor="ctr"/>
-          <a:lstStyle/>
-          <a:p>
-            <a:pPr algn="r" indent="0" marL="0">
-              <a:buNone/>
-            </a:pPr>
-            <a:r>
-              <a:rPr lang="en-US" sz="1400" b="1" dirty="0">
-                <a:solidFill>
-                  <a:srgbClr val="1C3F6E"/>
-                </a:solidFill>
-                <a:latin typeface="Calibri" pitchFamily="34" charset="0"/>
-                <a:ea typeface="Calibri" pitchFamily="34" charset="-122"/>
-                <a:cs typeface="Calibri" pitchFamily="34" charset="-120"/>
-              </a:rPr>
               <a:t>LOGBOOK</a:t>
             </a:r>
             <a:endParaRPr lang="en-US" sz="1400" dirty="0"/>
@@ -18727,7 +18344,7 @@
       </p:sp>
       <p:graphicFrame>
         <p:nvGraphicFramePr>
-          <p:cNvPr id="51" name="Table 0"/>
+          <p:cNvPr id="50" name="Table 0"/>
           <p:cNvGraphicFramePr>
             <a:graphicFrameLocks noGrp="1"/>
           </p:cNvGraphicFramePr>
@@ -19349,7 +18966,7 @@
             <a:pPr algn="ctr"/>
             <a:fld id="{F7021451-1387-4CA6-816F-3879F97B5CBC}" type="slidenum">
               <a:rPr b="1" lang="en-US"/>
-              <a:t>50</a:t>
+              <a:t>49</a:t>
             </a:fld>
             <a:endParaRPr lang="en-US"/>
           </a:p>
@@ -19363,9 +18980,9 @@
 </p:sld>
 </file>
 
-<file path=ppt/slides/slide51.xml><?xml version="1.0" encoding="utf-8"?>
+<file path=ppt/slides/slide5.xml><?xml version="1.0" encoding="utf-8"?>
 <p:sld xmlns:a="http://schemas.openxmlformats.org/drawingml/2006/main" xmlns:r="http://schemas.openxmlformats.org/officeDocument/2006/relationships" xmlns:p="http://schemas.openxmlformats.org/presentationml/2006/main">
-  <p:cSld name="Slide 51">
+  <p:cSld name="Slide 5">
     <p:spTree>
       <p:nvGrpSpPr>
         <p:cNvPr id="1" name=""/>
@@ -19413,6 +19030,225 @@
                 <a:ea typeface="Calibri" pitchFamily="34" charset="-122"/>
                 <a:cs typeface="Calibri" pitchFamily="34" charset="-120"/>
               </a:rPr>
+              <a:t>HOMEWORK CORRECTION</a:t>
+            </a:r>
+            <a:endParaRPr lang="en-US" sz="1400" dirty="0"/>
+          </a:p>
+        </p:txBody>
+      </p:sp>
+      <p:pic>
+        <p:nvPicPr>
+          <p:cNvPr id="3" name="Image 0" descr="/home/claude/f4/img/minesec_sheet.png">    </p:cNvPr>
+          <p:cNvPicPr>
+            <a:picLocks noChangeAspect="1"/>
+          </p:cNvPicPr>
+          <p:nvPr/>
+        </p:nvPicPr>
+        <p:blipFill>
+          <a:blip r:embed="rId1"/>
+          <a:stretch>
+            <a:fillRect/>
+          </a:stretch>
+        </p:blipFill>
+        <p:spPr>
+          <a:xfrm>
+            <a:off x="0" y="658368"/>
+            <a:ext cx="5120640" cy="5833872"/>
+          </a:xfrm>
+          <a:prstGeom prst="rect">
+            <a:avLst/>
+          </a:prstGeom>
+        </p:spPr>
+      </p:pic>
+      <p:sp>
+        <p:nvSpPr>
+          <p:cNvPr id="4" name="Text 1"/>
+          <p:cNvSpPr/>
+          <p:nvPr/>
+        </p:nvSpPr>
+        <p:spPr>
+          <a:xfrm>
+            <a:off x="5349240" y="1005840"/>
+            <a:ext cx="6522415" cy="731520"/>
+          </a:xfrm>
+          <a:prstGeom prst="rect">
+            <a:avLst/>
+          </a:prstGeom>
+          <a:noFill/>
+          <a:ln/>
+        </p:spPr>
+        <p:txBody>
+          <a:bodyPr wrap="square" lIns="0" tIns="0" rIns="0" bIns="0" rtlCol="0" anchor="ctr">
+            <a:normAutofit/>
+          </a:bodyPr>
+          <a:lstStyle/>
+          <a:p>
+            <a:pPr algn="ctr" indent="0" marL="0">
+              <a:buNone/>
+            </a:pPr>
+            <a:r>
+              <a:rPr lang="en-US" sz="3600" b="1" dirty="0">
+                <a:solidFill>
+                  <a:srgbClr val="990011"/>
+                </a:solidFill>
+                <a:latin typeface="Times New Roman" pitchFamily="34" charset="0"/>
+                <a:ea typeface="Times New Roman" pitchFamily="34" charset="-122"/>
+                <a:cs typeface="Times New Roman" pitchFamily="34" charset="-120"/>
+              </a:rPr>
+              <a:t>Correction: Possible Answer</a:t>
+            </a:r>
+            <a:endParaRPr lang="en-US" sz="3600" dirty="0"/>
+          </a:p>
+        </p:txBody>
+      </p:sp>
+      <p:sp>
+        <p:nvSpPr>
+          <p:cNvPr id="5" name="Text 2"/>
+          <p:cNvSpPr/>
+          <p:nvPr/>
+        </p:nvSpPr>
+        <p:spPr>
+          <a:xfrm>
+            <a:off x="5349240" y="1783080"/>
+            <a:ext cx="6522415" cy="4663440"/>
+          </a:xfrm>
+          <a:prstGeom prst="rect">
+            <a:avLst/>
+          </a:prstGeom>
+          <a:noFill/>
+          <a:ln/>
+        </p:spPr>
+        <p:txBody>
+          <a:bodyPr wrap="square" lIns="0" tIns="0" rIns="0" bIns="0" rtlCol="0" anchor="t"/>
+          <a:lstStyle/>
+          <a:p>
+            <a:pPr algn="l" indent="0" marL="0">
+              <a:spcAft>
+                <a:spcPts val="800"/>
+              </a:spcAft>
+              <a:buNone/>
+            </a:pPr>
+            <a:r>
+              <a:rPr lang="en-US" sz="4000" dirty="0">
+                <a:solidFill>
+                  <a:srgbClr val="111111"/>
+                </a:solidFill>
+                <a:latin typeface="Times New Roman" pitchFamily="34" charset="0"/>
+                <a:ea typeface="Times New Roman" pitchFamily="34" charset="-122"/>
+                <a:cs typeface="Times New Roman" pitchFamily="34" charset="-120"/>
+              </a:rPr>
+              <a:t>Examples: very tall trees growing close together; green leaves all year; many climbing plants; plantains, cocoa and oil palms around the houses.</a:t>
+            </a:r>
+            <a:endParaRPr lang="en-US" sz="4000" dirty="0"/>
+          </a:p>
+        </p:txBody>
+      </p:sp>
+      <p:sp>
+        <p:nvSpPr>
+          <p:cNvPr id="25" name="Slide Number Placeholder 0"/>
+          <p:cNvSpPr>
+            <a:spLocks noGrp="1"/>
+          </p:cNvSpPr>
+          <p:nvPr>
+            <p:ph type="sldNum" sz="quarter" idx="4294967295"/>
+          </p:nvPr>
+        </p:nvSpPr>
+        <p:spPr>
+          <a:xfrm>
+            <a:off x="27432" y="91440"/>
+            <a:ext cx="585216" cy="475488"/>
+          </a:xfrm>
+          <a:prstGeom prst="rect">
+            <a:avLst/>
+          </a:prstGeom>
+          <a:extLst>
+            <a:ext uri="{C572A759-6A51-4108-AA02-DFA0A04FC94B}">
+              <ma14:wrappingTextBoxFlag xmlns:ma14="http://schemas.microsoft.com/office/mac/drawingml/2011/main" val="0"/>
+            </a:ext>
+          </a:extLst>
+        </p:spPr>
+        <p:txBody>
+          <a:bodyPr/>
+          <a:lstStyle>
+            <a:lvl1pPr>
+              <a:defRPr sz="2000">
+                <a:solidFill>
+                  <a:srgbClr val="FFFFFF"/>
+                </a:solidFill>
+                <a:latin typeface="Calibri"/>
+                <a:ea typeface="Calibri"/>
+                <a:cs typeface="Calibri"/>
+              </a:defRPr>
+            </a:lvl1pPr>
+          </a:lstStyle>
+          <a:p>
+            <a:pPr algn="ctr"/>
+            <a:fld id="{F7021451-1387-4CA6-816F-3879F97B5CBC}" type="slidenum">
+              <a:rPr b="1" lang="en-US"/>
+              <a:t>5</a:t>
+            </a:fld>
+            <a:endParaRPr lang="en-US"/>
+          </a:p>
+        </p:txBody>
+      </p:sp>
+    </p:spTree>
+  </p:cSld>
+  <p:clrMapOvr>
+    <a:masterClrMapping/>
+  </p:clrMapOvr>
+</p:sld>
+</file>
+
+<file path=ppt/slides/slide50.xml><?xml version="1.0" encoding="utf-8"?>
+<p:sld xmlns:a="http://schemas.openxmlformats.org/drawingml/2006/main" xmlns:r="http://schemas.openxmlformats.org/officeDocument/2006/relationships" xmlns:p="http://schemas.openxmlformats.org/presentationml/2006/main">
+  <p:cSld name="Slide 50">
+    <p:spTree>
+      <p:nvGrpSpPr>
+        <p:cNvPr id="1" name=""/>
+        <p:cNvGrpSpPr/>
+        <p:nvPr/>
+      </p:nvGrpSpPr>
+      <p:grpSpPr>
+        <a:xfrm>
+          <a:off x="0" y="0"/>
+          <a:ext cx="0" cy="0"/>
+          <a:chOff x="0" y="0"/>
+          <a:chExt cx="0" cy="0"/>
+        </a:xfrm>
+      </p:grpSpPr>
+      <p:sp>
+        <p:nvSpPr>
+          <p:cNvPr id="2" name="Text 0"/>
+          <p:cNvSpPr/>
+          <p:nvPr/>
+        </p:nvSpPr>
+        <p:spPr>
+          <a:xfrm>
+            <a:off x="457200" y="713232"/>
+            <a:ext cx="11368735" cy="274320"/>
+          </a:xfrm>
+          <a:prstGeom prst="rect">
+            <a:avLst/>
+          </a:prstGeom>
+          <a:noFill/>
+          <a:ln/>
+        </p:spPr>
+        <p:txBody>
+          <a:bodyPr wrap="square" lIns="0" tIns="0" rIns="0" bIns="0" rtlCol="0" anchor="ctr"/>
+          <a:lstStyle/>
+          <a:p>
+            <a:pPr algn="r" indent="0" marL="0">
+              <a:buNone/>
+            </a:pPr>
+            <a:r>
+              <a:rPr lang="en-US" sz="1400" b="1" dirty="0">
+                <a:solidFill>
+                  <a:srgbClr val="1C3F6E"/>
+                </a:solidFill>
+                <a:latin typeface="Calibri" pitchFamily="34" charset="0"/>
+                <a:ea typeface="Calibri" pitchFamily="34" charset="-122"/>
+                <a:cs typeface="Calibri" pitchFamily="34" charset="-120"/>
+              </a:rPr>
               <a:t>LOGBOOK</a:t>
             </a:r>
             <a:endParaRPr lang="en-US" sz="1400" dirty="0"/>
@@ -19460,7 +19296,7 @@
       </p:sp>
       <p:graphicFrame>
         <p:nvGraphicFramePr>
-          <p:cNvPr id="52" name="Table 0"/>
+          <p:cNvPr id="51" name="Table 0"/>
           <p:cNvGraphicFramePr>
             <a:graphicFrameLocks noGrp="1"/>
           </p:cNvGraphicFramePr>
@@ -20220,6 +20056,352 @@
             <a:pPr algn="ctr"/>
             <a:fld id="{F7021451-1387-4CA6-816F-3879F97B5CBC}" type="slidenum">
               <a:rPr b="1" lang="en-US"/>
+              <a:t>50</a:t>
+            </a:fld>
+            <a:endParaRPr lang="en-US"/>
+          </a:p>
+        </p:txBody>
+      </p:sp>
+    </p:spTree>
+  </p:cSld>
+  <p:clrMapOvr>
+    <a:masterClrMapping/>
+  </p:clrMapOvr>
+</p:sld>
+</file>
+
+<file path=ppt/slides/slide51.xml><?xml version="1.0" encoding="utf-8"?>
+<p:sld xmlns:a="http://schemas.openxmlformats.org/drawingml/2006/main" xmlns:r="http://schemas.openxmlformats.org/officeDocument/2006/relationships" xmlns:p="http://schemas.openxmlformats.org/presentationml/2006/main">
+  <p:cSld name="Slide 51">
+    <p:spTree>
+      <p:nvGrpSpPr>
+        <p:cNvPr id="1" name=""/>
+        <p:cNvGrpSpPr/>
+        <p:nvPr/>
+      </p:nvGrpSpPr>
+      <p:grpSpPr>
+        <a:xfrm>
+          <a:off x="0" y="0"/>
+          <a:ext cx="0" cy="0"/>
+          <a:chOff x="0" y="0"/>
+          <a:chExt cx="0" cy="0"/>
+        </a:xfrm>
+      </p:grpSpPr>
+      <p:sp>
+        <p:nvSpPr>
+          <p:cNvPr id="2" name="Text 0"/>
+          <p:cNvSpPr/>
+          <p:nvPr/>
+        </p:nvSpPr>
+        <p:spPr>
+          <a:xfrm>
+            <a:off x="457200" y="713232"/>
+            <a:ext cx="11368735" cy="274320"/>
+          </a:xfrm>
+          <a:prstGeom prst="rect">
+            <a:avLst/>
+          </a:prstGeom>
+          <a:noFill/>
+          <a:ln/>
+        </p:spPr>
+        <p:txBody>
+          <a:bodyPr wrap="square" lIns="0" tIns="0" rIns="0" bIns="0" rtlCol="0" anchor="ctr"/>
+          <a:lstStyle/>
+          <a:p>
+            <a:pPr algn="r" indent="0" marL="0">
+              <a:buNone/>
+            </a:pPr>
+            <a:r>
+              <a:rPr lang="en-US" sz="1400" b="1" dirty="0">
+                <a:solidFill>
+                  <a:srgbClr val="1C3F6E"/>
+                </a:solidFill>
+                <a:latin typeface="Calibri" pitchFamily="34" charset="0"/>
+                <a:ea typeface="Calibri" pitchFamily="34" charset="-122"/>
+                <a:cs typeface="Calibri" pitchFamily="34" charset="-120"/>
+              </a:rPr>
+              <a:t>TEACHER'S NOTE</a:t>
+            </a:r>
+            <a:endParaRPr lang="en-US" sz="1400" dirty="0"/>
+          </a:p>
+        </p:txBody>
+      </p:sp>
+      <p:pic>
+        <p:nvPicPr>
+          <p:cNvPr id="3" name="Image 0" descr="/home/claude/f4/img/minesec_sheet.png">    </p:cNvPr>
+          <p:cNvPicPr>
+            <a:picLocks noChangeAspect="1"/>
+          </p:cNvPicPr>
+          <p:nvPr/>
+        </p:nvPicPr>
+        <p:blipFill>
+          <a:blip r:embed="rId1"/>
+          <a:stretch>
+            <a:fillRect/>
+          </a:stretch>
+        </p:blipFill>
+        <p:spPr>
+          <a:xfrm>
+            <a:off x="0" y="658368"/>
+            <a:ext cx="2468880" cy="5833872"/>
+          </a:xfrm>
+          <a:prstGeom prst="rect">
+            <a:avLst/>
+          </a:prstGeom>
+        </p:spPr>
+      </p:pic>
+      <p:sp>
+        <p:nvSpPr>
+          <p:cNvPr id="4" name="Text 1"/>
+          <p:cNvSpPr/>
+          <p:nvPr/>
+        </p:nvSpPr>
+        <p:spPr>
+          <a:xfrm>
+            <a:off x="2697480" y="1005840"/>
+            <a:ext cx="9174175" cy="731520"/>
+          </a:xfrm>
+          <a:prstGeom prst="rect">
+            <a:avLst/>
+          </a:prstGeom>
+          <a:noFill/>
+          <a:ln/>
+        </p:spPr>
+        <p:txBody>
+          <a:bodyPr wrap="square" lIns="0" tIns="0" rIns="0" bIns="0" rtlCol="0" anchor="ctr">
+            <a:normAutofit/>
+          </a:bodyPr>
+          <a:lstStyle/>
+          <a:p>
+            <a:pPr algn="ctr" indent="0" marL="0">
+              <a:buNone/>
+            </a:pPr>
+            <a:r>
+              <a:rPr lang="en-US" sz="3600" b="1" dirty="0">
+                <a:solidFill>
+                  <a:srgbClr val="990011"/>
+                </a:solidFill>
+                <a:latin typeface="Times New Roman" pitchFamily="34" charset="0"/>
+                <a:ea typeface="Times New Roman" pitchFamily="34" charset="-122"/>
+                <a:cs typeface="Times New Roman" pitchFamily="34" charset="-120"/>
+              </a:rPr>
+              <a:t>Teacher's Note</a:t>
+            </a:r>
+            <a:endParaRPr lang="en-US" sz="3600" dirty="0"/>
+          </a:p>
+        </p:txBody>
+      </p:sp>
+      <p:sp>
+        <p:nvSpPr>
+          <p:cNvPr id="5" name="Text 2"/>
+          <p:cNvSpPr/>
+          <p:nvPr/>
+        </p:nvSpPr>
+        <p:spPr>
+          <a:xfrm>
+            <a:off x="2697480" y="1783080"/>
+            <a:ext cx="9174175" cy="4663440"/>
+          </a:xfrm>
+          <a:prstGeom prst="rect">
+            <a:avLst/>
+          </a:prstGeom>
+          <a:noFill/>
+          <a:ln/>
+        </p:spPr>
+        <p:txBody>
+          <a:bodyPr wrap="square" lIns="0" tIns="0" rIns="0" bIns="0" rtlCol="0" anchor="t"/>
+          <a:lstStyle/>
+          <a:p>
+            <a:pPr algn="l" marL="342900" indent="-342900">
+              <a:spcAft>
+                <a:spcPts val="800"/>
+              </a:spcAft>
+              <a:buSzPct val="100000"/>
+              <a:buChar char="•"/>
+            </a:pPr>
+            <a:r>
+              <a:rPr lang="en-US" sz="2000" dirty="0">
+                <a:solidFill>
+                  <a:srgbClr val="111111"/>
+                </a:solidFill>
+                <a:latin typeface="Calibri" pitchFamily="34" charset="0"/>
+                <a:ea typeface="Calibri" pitchFamily="34" charset="-122"/>
+                <a:cs typeface="Calibri" pitchFamily="34" charset="-120"/>
+              </a:rPr>
+              <a:t>Timing: Homework correction, plan, objectives 8 min | Recall, situation, action 10 min | 5 activities 30 min | Board summary (copying) 30 min | Evaluation, remediation 10 min | Homework, next lesson 5 min | Logbook 7 min</a:t>
+            </a:r>
+            <a:endParaRPr lang="en-US" sz="2000" dirty="0"/>
+          </a:p>
+          <a:p>
+            <a:pPr algn="l" marL="342900" indent="-342900">
+              <a:spcAft>
+                <a:spcPts val="800"/>
+              </a:spcAft>
+              <a:buSzPct val="100000"/>
+              <a:buChar char="•"/>
+            </a:pPr>
+            <a:r>
+              <a:rPr lang="en-US" sz="2000" dirty="0">
+                <a:solidFill>
+                  <a:srgbClr val="111111"/>
+                </a:solidFill>
+                <a:latin typeface="Calibri" pitchFamily="34" charset="0"/>
+                <a:ea typeface="Calibri" pitchFamily="34" charset="-122"/>
+                <a:cs typeface="Calibri" pitchFamily="34" charset="-120"/>
+              </a:rPr>
+              <a:t>Hardwoods of the Cameroon forest: sapele, iroko, mahogany (acajou), ayous, moabi, ebony.</a:t>
+            </a:r>
+            <a:endParaRPr lang="en-US" sz="2000" dirty="0"/>
+          </a:p>
+          <a:p>
+            <a:pPr algn="l" marL="342900" indent="-342900">
+              <a:spcAft>
+                <a:spcPts val="800"/>
+              </a:spcAft>
+              <a:buSzPct val="100000"/>
+              <a:buChar char="•"/>
+            </a:pPr>
+            <a:r>
+              <a:rPr lang="en-US" sz="2000" dirty="0">
+                <a:solidFill>
+                  <a:srgbClr val="111111"/>
+                </a:solidFill>
+                <a:latin typeface="Calibri" pitchFamily="34" charset="0"/>
+                <a:ea typeface="Calibri" pitchFamily="34" charset="-122"/>
+                <a:cs typeface="Calibri" pitchFamily="34" charset="-120"/>
+              </a:rPr>
+              <a:t>Without the projector (Activity 1): compare with the trees of Garoua in March.</a:t>
+            </a:r>
+            <a:endParaRPr lang="en-US" sz="2000" dirty="0"/>
+          </a:p>
+          <a:p>
+            <a:pPr algn="l" marL="342900" indent="-342900">
+              <a:spcAft>
+                <a:spcPts val="800"/>
+              </a:spcAft>
+              <a:buSzPct val="100000"/>
+              <a:buChar char="•"/>
+            </a:pPr>
+            <a:r>
+              <a:rPr lang="en-US" sz="2000" dirty="0">
+                <a:solidFill>
+                  <a:srgbClr val="111111"/>
+                </a:solidFill>
+                <a:latin typeface="Calibri" pitchFamily="34" charset="0"/>
+                <a:ea typeface="Calibri" pitchFamily="34" charset="-122"/>
+                <a:cs typeface="Calibri" pitchFamily="34" charset="-120"/>
+              </a:rPr>
+              <a:t>Without the projector (Activity 2): draw the layers on the board.</a:t>
+            </a:r>
+            <a:endParaRPr lang="en-US" sz="2000" dirty="0"/>
+          </a:p>
+          <a:p>
+            <a:pPr algn="l" marL="342900" indent="-342900">
+              <a:spcAft>
+                <a:spcPts val="800"/>
+              </a:spcAft>
+              <a:buSzPct val="100000"/>
+              <a:buChar char="•"/>
+            </a:pPr>
+            <a:r>
+              <a:rPr lang="en-US" sz="2000" dirty="0">
+                <a:solidFill>
+                  <a:srgbClr val="111111"/>
+                </a:solidFill>
+                <a:latin typeface="Calibri" pitchFamily="34" charset="0"/>
+                <a:ea typeface="Calibri" pitchFamily="34" charset="-122"/>
+                <a:cs typeface="Calibri" pitchFamily="34" charset="-120"/>
+              </a:rPr>
+              <a:t>Without the projector (Activity 3): show the coast on a map.</a:t>
+            </a:r>
+            <a:endParaRPr lang="en-US" sz="2000" dirty="0"/>
+          </a:p>
+          <a:p>
+            <a:pPr algn="l" marL="342900" indent="-342900">
+              <a:spcAft>
+                <a:spcPts val="800"/>
+              </a:spcAft>
+              <a:buSzPct val="100000"/>
+              <a:buChar char="•"/>
+            </a:pPr>
+            <a:r>
+              <a:rPr lang="en-US" sz="2000" dirty="0">
+                <a:solidFill>
+                  <a:srgbClr val="111111"/>
+                </a:solidFill>
+                <a:latin typeface="Calibri" pitchFamily="34" charset="0"/>
+                <a:ea typeface="Calibri" pitchFamily="34" charset="-122"/>
+                <a:cs typeface="Calibri" pitchFamily="34" charset="-120"/>
+              </a:rPr>
+              <a:t>Without the projector (Activity 4): show red soil.</a:t>
+            </a:r>
+            <a:endParaRPr lang="en-US" sz="2000" dirty="0"/>
+          </a:p>
+          <a:p>
+            <a:pPr algn="l" marL="342900" indent="-342900">
+              <a:spcAft>
+                <a:spcPts val="800"/>
+              </a:spcAft>
+              <a:buSzPct val="100000"/>
+              <a:buChar char="•"/>
+            </a:pPr>
+            <a:r>
+              <a:rPr lang="en-US" sz="2000" dirty="0">
+                <a:solidFill>
+                  <a:srgbClr val="111111"/>
+                </a:solidFill>
+                <a:latin typeface="Calibri" pitchFamily="34" charset="0"/>
+                <a:ea typeface="Calibri" pitchFamily="34" charset="-122"/>
+                <a:cs typeface="Calibri" pitchFamily="34" charset="-120"/>
+              </a:rPr>
+              <a:t>Without the projector (Activity 5): pour water through soil in a bottle.</a:t>
+            </a:r>
+            <a:endParaRPr lang="en-US" sz="2000" dirty="0"/>
+          </a:p>
+        </p:txBody>
+      </p:sp>
+      <p:sp>
+        <p:nvSpPr>
+          <p:cNvPr id="25" name="Slide Number Placeholder 0"/>
+          <p:cNvSpPr>
+            <a:spLocks noGrp="1"/>
+          </p:cNvSpPr>
+          <p:nvPr>
+            <p:ph type="sldNum" sz="quarter" idx="4294967295"/>
+          </p:nvPr>
+        </p:nvSpPr>
+        <p:spPr>
+          <a:xfrm>
+            <a:off x="27432" y="91440"/>
+            <a:ext cx="585216" cy="475488"/>
+          </a:xfrm>
+          <a:prstGeom prst="rect">
+            <a:avLst/>
+          </a:prstGeom>
+          <a:extLst>
+            <a:ext uri="{C572A759-6A51-4108-AA02-DFA0A04FC94B}">
+              <ma14:wrappingTextBoxFlag xmlns:ma14="http://schemas.microsoft.com/office/mac/drawingml/2011/main" val="0"/>
+            </a:ext>
+          </a:extLst>
+        </p:spPr>
+        <p:txBody>
+          <a:bodyPr/>
+          <a:lstStyle>
+            <a:lvl1pPr>
+              <a:defRPr sz="2000">
+                <a:solidFill>
+                  <a:srgbClr val="FFFFFF"/>
+                </a:solidFill>
+                <a:latin typeface="Calibri"/>
+                <a:ea typeface="Calibri"/>
+                <a:cs typeface="Calibri"/>
+              </a:defRPr>
+            </a:lvl1pPr>
+          </a:lstStyle>
+          <a:p>
+            <a:pPr algn="ctr"/>
+            <a:fld id="{F7021451-1387-4CA6-816F-3879F97B5CBC}" type="slidenum">
+              <a:rPr b="1" lang="en-US"/>
               <a:t>51</a:t>
             </a:fld>
             <a:endParaRPr lang="en-US"/>
@@ -20284,7 +20466,7 @@
                 <a:ea typeface="Calibri" pitchFamily="34" charset="-122"/>
                 <a:cs typeface="Calibri" pitchFamily="34" charset="-120"/>
               </a:rPr>
-              <a:t>TEACHER'S NOTE</a:t>
+              <a:t>REFERENCES</a:t>
             </a:r>
             <a:endParaRPr lang="en-US" sz="1400" dirty="0"/>
           </a:p>
@@ -20307,7 +20489,7 @@
         <p:spPr>
           <a:xfrm>
             <a:off x="0" y="658368"/>
-            <a:ext cx="1463040" cy="5833872"/>
+            <a:ext cx="2468880" cy="5833872"/>
           </a:xfrm>
           <a:prstGeom prst="rect">
             <a:avLst/>
@@ -20322,8 +20504,8 @@
         </p:nvSpPr>
         <p:spPr>
           <a:xfrm>
-            <a:off x="1691640" y="1005840"/>
-            <a:ext cx="10180015" cy="731520"/>
+            <a:off x="2697480" y="1005840"/>
+            <a:ext cx="9174175" cy="731520"/>
           </a:xfrm>
           <a:prstGeom prst="rect">
             <a:avLst/>
@@ -20349,7 +20531,7 @@
                 <a:ea typeface="Times New Roman" pitchFamily="34" charset="-122"/>
                 <a:cs typeface="Times New Roman" pitchFamily="34" charset="-120"/>
               </a:rPr>
-              <a:t>Teacher's Note</a:t>
+              <a:t>References</a:t>
             </a:r>
             <a:endParaRPr lang="en-US" sz="3600" dirty="0"/>
           </a:p>
@@ -20363,8 +20545,8 @@
         </p:nvSpPr>
         <p:spPr>
           <a:xfrm>
-            <a:off x="1691640" y="1783080"/>
-            <a:ext cx="10180015" cy="4663440"/>
+            <a:off x="2697480" y="1783080"/>
+            <a:ext cx="9174175" cy="4663440"/>
           </a:xfrm>
           <a:prstGeom prst="rect">
             <a:avLst/>
@@ -20384,7 +20566,7 @@
               <a:buChar char="•"/>
             </a:pPr>
             <a:r>
-              <a:rPr lang="en-US" sz="2000" dirty="0">
+              <a:rPr lang="en-US" sz="1800" dirty="0">
                 <a:solidFill>
                   <a:srgbClr val="111111"/>
                 </a:solidFill>
@@ -20392,9 +20574,9 @@
                 <a:ea typeface="Calibri" pitchFamily="34" charset="-122"/>
                 <a:cs typeface="Calibri" pitchFamily="34" charset="-120"/>
               </a:rPr>
-              <a:t>Timing: Homework correction, plan, objectives 8 min | Recall, situation, action 10 min | 5 activities 30 min | Board summary (copying) 30 min | Evaluation, remediation 10 min | Homework, next lesson 5 min | Logbook 7 min</a:t>
-            </a:r>
-            <a:endParaRPr lang="en-US" sz="2000" dirty="0"/>
+              <a:t>Harmonised Progression Sheet, Economic Geography (5051), Form 2 — week 3.</a:t>
+            </a:r>
+            <a:endParaRPr lang="en-US" sz="1800" dirty="0"/>
           </a:p>
           <a:p>
             <a:pPr algn="l" marL="342900" indent="-342900">
@@ -20405,7 +20587,7 @@
               <a:buChar char="•"/>
             </a:pPr>
             <a:r>
-              <a:rPr lang="en-US" sz="2000" dirty="0">
+              <a:rPr lang="en-US" sz="1800" dirty="0">
                 <a:solidFill>
                   <a:srgbClr val="111111"/>
                 </a:solidFill>
@@ -20413,9 +20595,9 @@
                 <a:ea typeface="Calibri" pitchFamily="34" charset="-122"/>
                 <a:cs typeface="Calibri" pitchFamily="34" charset="-120"/>
               </a:rPr>
-              <a:t>Hardwoods of the Cameroon forest: sapele, iroko, mahogany (acajou), ayous, moabi, ebony.</a:t>
-            </a:r>
-            <a:endParaRPr lang="en-US" sz="2000" dirty="0"/>
+              <a:t>Climate data for Yaoundé: long-term averages (approximate).</a:t>
+            </a:r>
+            <a:endParaRPr lang="en-US" sz="1800" dirty="0"/>
           </a:p>
           <a:p>
             <a:pPr algn="l" marL="342900" indent="-342900">
@@ -20426,7 +20608,7 @@
               <a:buChar char="•"/>
             </a:pPr>
             <a:r>
-              <a:rPr lang="en-US" sz="2000" dirty="0">
+              <a:rPr lang="en-US" sz="1800" dirty="0">
                 <a:solidFill>
                   <a:srgbClr val="111111"/>
                 </a:solidFill>
@@ -20434,9 +20616,9 @@
                 <a:ea typeface="Calibri" pitchFamily="34" charset="-122"/>
                 <a:cs typeface="Calibri" pitchFamily="34" charset="-120"/>
               </a:rPr>
-              <a:t>Without the projector (Activity 1): compare with the trees of Garoua that lose their leaves in the dry season.</a:t>
-            </a:r>
-            <a:endParaRPr lang="en-US" sz="2000" dirty="0"/>
+              <a:t>Photo, Activity 1: “Amazon 11” by CIAT International Center for Tropical Agriculture, CC BY-SA 2.0, via Flickr (https://www.flickr.com/photos/38476503@N08/5641587148)</a:t>
+            </a:r>
+            <a:endParaRPr lang="en-US" sz="1800" dirty="0"/>
           </a:p>
           <a:p>
             <a:pPr algn="l" marL="342900" indent="-342900">
@@ -20447,7 +20629,7 @@
               <a:buChar char="•"/>
             </a:pPr>
             <a:r>
-              <a:rPr lang="en-US" sz="2000" dirty="0">
+              <a:rPr lang="en-US" sz="1800" dirty="0">
                 <a:solidFill>
                   <a:srgbClr val="111111"/>
                 </a:solidFill>
@@ -20455,9 +20637,9 @@
                 <a:ea typeface="Calibri" pitchFamily="34" charset="-122"/>
                 <a:cs typeface="Calibri" pitchFamily="34" charset="-120"/>
               </a:rPr>
-              <a:t>Without the projector (Activity 2): draw the layers on the board.</a:t>
-            </a:r>
-            <a:endParaRPr lang="en-US" sz="2000" dirty="0"/>
+              <a:t>Photo, Activity 3: “Pitchavaram waterway - Mangrove forest” by Balaji.B Photography, CC BY 2.0, via Flickr (https://www.flickr.com/photos/81073027@N00/1745978833)</a:t>
+            </a:r>
+            <a:endParaRPr lang="en-US" sz="1800" dirty="0"/>
           </a:p>
           <a:p>
             <a:pPr algn="l" marL="342900" indent="-342900">
@@ -20468,7 +20650,7 @@
               <a:buChar char="•"/>
             </a:pPr>
             <a:r>
-              <a:rPr lang="en-US" sz="2000" dirty="0">
+              <a:rPr lang="en-US" sz="1800" dirty="0">
                 <a:solidFill>
                   <a:srgbClr val="111111"/>
                 </a:solidFill>
@@ -20476,9 +20658,9 @@
                 <a:ea typeface="Calibri" pitchFamily="34" charset="-122"/>
                 <a:cs typeface="Calibri" pitchFamily="34" charset="-120"/>
               </a:rPr>
-              <a:t>Without the projector (Activity 3): describe the mangroves of the Wouri estuary.</a:t>
-            </a:r>
-            <a:endParaRPr lang="en-US" sz="2000" dirty="0"/>
+              <a:t>Photo, Activity 4: “in the middle of nowhere, morocco” by mariusz kluzniak, CC BY-NC-ND 2.0, via Flickr (https://www.flickr.com/photos/39997856@N03/8398997251)</a:t>
+            </a:r>
+            <a:endParaRPr lang="en-US" sz="1800" dirty="0"/>
           </a:p>
           <a:p>
             <a:pPr algn="l" marL="342900" indent="-342900">
@@ -20489,7 +20671,7 @@
               <a:buChar char="•"/>
             </a:pPr>
             <a:r>
-              <a:rPr lang="en-US" sz="2000" dirty="0">
+              <a:rPr lang="en-US" sz="1800" dirty="0">
                 <a:solidFill>
                   <a:srgbClr val="111111"/>
                 </a:solidFill>
@@ -20497,9 +20679,9 @@
                 <a:ea typeface="Calibri" pitchFamily="34" charset="-122"/>
                 <a:cs typeface="Calibri" pitchFamily="34" charset="-120"/>
               </a:rPr>
-              <a:t>Without the projector (Activity 4): show a handful of red soil.</a:t>
-            </a:r>
-            <a:endParaRPr lang="en-US" sz="2000" dirty="0"/>
+              <a:t>Photo, Activity 5: “Laterite soil bricks in Richard Rebello's farm” by India Water Portal, CC BY-NC-SA 2.0, via Flickr (https://www.flickr.com/photos/21623815@N03/10720461943)</a:t>
+            </a:r>
+            <a:endParaRPr lang="en-US" sz="1800" dirty="0"/>
           </a:p>
           <a:p>
             <a:pPr algn="l" marL="342900" indent="-342900">
@@ -20510,7 +20692,7 @@
               <a:buChar char="•"/>
             </a:pPr>
             <a:r>
-              <a:rPr lang="en-US" sz="2000" dirty="0">
+              <a:rPr lang="en-US" sz="1800" dirty="0">
                 <a:solidFill>
                   <a:srgbClr val="111111"/>
                 </a:solidFill>
@@ -20518,9 +20700,9 @@
                 <a:ea typeface="Calibri" pitchFamily="34" charset="-122"/>
                 <a:cs typeface="Calibri" pitchFamily="34" charset="-120"/>
               </a:rPr>
-              <a:t>Without the projector (Activity 5): pour water through a pot of soil and show the dirty water that comes out.</a:t>
-            </a:r>
-            <a:endParaRPr lang="en-US" sz="2000" dirty="0"/>
+              <a:t>Diagrams and animations: drawn for this lesson (Geography Department).</a:t>
+            </a:r>
+            <a:endParaRPr lang="en-US" sz="1800" dirty="0"/>
           </a:p>
         </p:txBody>
       </p:sp>
@@ -20567,352 +20749,6 @@
             <a:fld id="{F7021451-1387-4CA6-816F-3879F97B5CBC}" type="slidenum">
               <a:rPr b="1" lang="en-US"/>
               <a:t>52</a:t>
-            </a:fld>
-            <a:endParaRPr lang="en-US"/>
-          </a:p>
-        </p:txBody>
-      </p:sp>
-    </p:spTree>
-  </p:cSld>
-  <p:clrMapOvr>
-    <a:masterClrMapping/>
-  </p:clrMapOvr>
-</p:sld>
-</file>
-
-<file path=ppt/slides/slide53.xml><?xml version="1.0" encoding="utf-8"?>
-<p:sld xmlns:a="http://schemas.openxmlformats.org/drawingml/2006/main" xmlns:r="http://schemas.openxmlformats.org/officeDocument/2006/relationships" xmlns:p="http://schemas.openxmlformats.org/presentationml/2006/main">
-  <p:cSld name="Slide 53">
-    <p:spTree>
-      <p:nvGrpSpPr>
-        <p:cNvPr id="1" name=""/>
-        <p:cNvGrpSpPr/>
-        <p:nvPr/>
-      </p:nvGrpSpPr>
-      <p:grpSpPr>
-        <a:xfrm>
-          <a:off x="0" y="0"/>
-          <a:ext cx="0" cy="0"/>
-          <a:chOff x="0" y="0"/>
-          <a:chExt cx="0" cy="0"/>
-        </a:xfrm>
-      </p:grpSpPr>
-      <p:sp>
-        <p:nvSpPr>
-          <p:cNvPr id="2" name="Text 0"/>
-          <p:cNvSpPr/>
-          <p:nvPr/>
-        </p:nvSpPr>
-        <p:spPr>
-          <a:xfrm>
-            <a:off x="457200" y="713232"/>
-            <a:ext cx="11368735" cy="274320"/>
-          </a:xfrm>
-          <a:prstGeom prst="rect">
-            <a:avLst/>
-          </a:prstGeom>
-          <a:noFill/>
-          <a:ln/>
-        </p:spPr>
-        <p:txBody>
-          <a:bodyPr wrap="square" lIns="0" tIns="0" rIns="0" bIns="0" rtlCol="0" anchor="ctr"/>
-          <a:lstStyle/>
-          <a:p>
-            <a:pPr algn="r" indent="0" marL="0">
-              <a:buNone/>
-            </a:pPr>
-            <a:r>
-              <a:rPr lang="en-US" sz="1400" b="1" dirty="0">
-                <a:solidFill>
-                  <a:srgbClr val="1C3F6E"/>
-                </a:solidFill>
-                <a:latin typeface="Calibri" pitchFamily="34" charset="0"/>
-                <a:ea typeface="Calibri" pitchFamily="34" charset="-122"/>
-                <a:cs typeface="Calibri" pitchFamily="34" charset="-120"/>
-              </a:rPr>
-              <a:t>REFERENCES</a:t>
-            </a:r>
-            <a:endParaRPr lang="en-US" sz="1400" dirty="0"/>
-          </a:p>
-        </p:txBody>
-      </p:sp>
-      <p:pic>
-        <p:nvPicPr>
-          <p:cNvPr id="3" name="Image 0" descr="/home/claude/f4/img/minesec_sheet.png">    </p:cNvPr>
-          <p:cNvPicPr>
-            <a:picLocks noChangeAspect="1"/>
-          </p:cNvPicPr>
-          <p:nvPr/>
-        </p:nvPicPr>
-        <p:blipFill>
-          <a:blip r:embed="rId1"/>
-          <a:stretch>
-            <a:fillRect/>
-          </a:stretch>
-        </p:blipFill>
-        <p:spPr>
-          <a:xfrm>
-            <a:off x="0" y="658368"/>
-            <a:ext cx="2468880" cy="5833872"/>
-          </a:xfrm>
-          <a:prstGeom prst="rect">
-            <a:avLst/>
-          </a:prstGeom>
-        </p:spPr>
-      </p:pic>
-      <p:sp>
-        <p:nvSpPr>
-          <p:cNvPr id="4" name="Text 1"/>
-          <p:cNvSpPr/>
-          <p:nvPr/>
-        </p:nvSpPr>
-        <p:spPr>
-          <a:xfrm>
-            <a:off x="2697480" y="1005840"/>
-            <a:ext cx="9174175" cy="731520"/>
-          </a:xfrm>
-          <a:prstGeom prst="rect">
-            <a:avLst/>
-          </a:prstGeom>
-          <a:noFill/>
-          <a:ln/>
-        </p:spPr>
-        <p:txBody>
-          <a:bodyPr wrap="square" lIns="0" tIns="0" rIns="0" bIns="0" rtlCol="0" anchor="ctr">
-            <a:normAutofit/>
-          </a:bodyPr>
-          <a:lstStyle/>
-          <a:p>
-            <a:pPr algn="ctr" indent="0" marL="0">
-              <a:buNone/>
-            </a:pPr>
-            <a:r>
-              <a:rPr lang="en-US" sz="3600" b="1" dirty="0">
-                <a:solidFill>
-                  <a:srgbClr val="990011"/>
-                </a:solidFill>
-                <a:latin typeface="Times New Roman" pitchFamily="34" charset="0"/>
-                <a:ea typeface="Times New Roman" pitchFamily="34" charset="-122"/>
-                <a:cs typeface="Times New Roman" pitchFamily="34" charset="-120"/>
-              </a:rPr>
-              <a:t>References</a:t>
-            </a:r>
-            <a:endParaRPr lang="en-US" sz="3600" dirty="0"/>
-          </a:p>
-        </p:txBody>
-      </p:sp>
-      <p:sp>
-        <p:nvSpPr>
-          <p:cNvPr id="5" name="Text 2"/>
-          <p:cNvSpPr/>
-          <p:nvPr/>
-        </p:nvSpPr>
-        <p:spPr>
-          <a:xfrm>
-            <a:off x="2697480" y="1783080"/>
-            <a:ext cx="9174175" cy="4663440"/>
-          </a:xfrm>
-          <a:prstGeom prst="rect">
-            <a:avLst/>
-          </a:prstGeom>
-          <a:noFill/>
-          <a:ln/>
-        </p:spPr>
-        <p:txBody>
-          <a:bodyPr wrap="square" lIns="0" tIns="0" rIns="0" bIns="0" rtlCol="0" anchor="t"/>
-          <a:lstStyle/>
-          <a:p>
-            <a:pPr algn="l" marL="342900" indent="-342900">
-              <a:spcAft>
-                <a:spcPts val="800"/>
-              </a:spcAft>
-              <a:buSzPct val="100000"/>
-              <a:buChar char="•"/>
-            </a:pPr>
-            <a:r>
-              <a:rPr lang="en-US" sz="1800" dirty="0">
-                <a:solidFill>
-                  <a:srgbClr val="111111"/>
-                </a:solidFill>
-                <a:latin typeface="Calibri" pitchFamily="34" charset="0"/>
-                <a:ea typeface="Calibri" pitchFamily="34" charset="-122"/>
-                <a:cs typeface="Calibri" pitchFamily="34" charset="-120"/>
-              </a:rPr>
-              <a:t>Harmonised Progression Sheet, Economic Geography (5051), Form 2 — week 3.</a:t>
-            </a:r>
-            <a:endParaRPr lang="en-US" sz="1800" dirty="0"/>
-          </a:p>
-          <a:p>
-            <a:pPr algn="l" marL="342900" indent="-342900">
-              <a:spcAft>
-                <a:spcPts val="800"/>
-              </a:spcAft>
-              <a:buSzPct val="100000"/>
-              <a:buChar char="•"/>
-            </a:pPr>
-            <a:r>
-              <a:rPr lang="en-US" sz="1800" dirty="0">
-                <a:solidFill>
-                  <a:srgbClr val="111111"/>
-                </a:solidFill>
-                <a:latin typeface="Calibri" pitchFamily="34" charset="0"/>
-                <a:ea typeface="Calibri" pitchFamily="34" charset="-122"/>
-                <a:cs typeface="Calibri" pitchFamily="34" charset="-120"/>
-              </a:rPr>
-              <a:t>Climate data for Yaoundé: long-term averages (approximate).</a:t>
-            </a:r>
-            <a:endParaRPr lang="en-US" sz="1800" dirty="0"/>
-          </a:p>
-          <a:p>
-            <a:pPr algn="l" marL="342900" indent="-342900">
-              <a:spcAft>
-                <a:spcPts val="800"/>
-              </a:spcAft>
-              <a:buSzPct val="100000"/>
-              <a:buChar char="•"/>
-            </a:pPr>
-            <a:r>
-              <a:rPr lang="en-US" sz="1800" dirty="0">
-                <a:solidFill>
-                  <a:srgbClr val="111111"/>
-                </a:solidFill>
-                <a:latin typeface="Calibri" pitchFamily="34" charset="0"/>
-                <a:ea typeface="Calibri" pitchFamily="34" charset="-122"/>
-                <a:cs typeface="Calibri" pitchFamily="34" charset="-120"/>
-              </a:rPr>
-              <a:t>Photo, Activity 1: “Amazon 11” by CIAT International Center for Tropical Agriculture, CC BY-SA 2.0, via Flickr (https://www.flickr.com/photos/38476503@N08/5641587148)</a:t>
-            </a:r>
-            <a:endParaRPr lang="en-US" sz="1800" dirty="0"/>
-          </a:p>
-          <a:p>
-            <a:pPr algn="l" marL="342900" indent="-342900">
-              <a:spcAft>
-                <a:spcPts val="800"/>
-              </a:spcAft>
-              <a:buSzPct val="100000"/>
-              <a:buChar char="•"/>
-            </a:pPr>
-            <a:r>
-              <a:rPr lang="en-US" sz="1800" dirty="0">
-                <a:solidFill>
-                  <a:srgbClr val="111111"/>
-                </a:solidFill>
-                <a:latin typeface="Calibri" pitchFamily="34" charset="0"/>
-                <a:ea typeface="Calibri" pitchFamily="34" charset="-122"/>
-                <a:cs typeface="Calibri" pitchFamily="34" charset="-120"/>
-              </a:rPr>
-              <a:t>Photo, Activity 3: “Pitchavaram waterway - Mangrove forest” by Balaji.B Photography, CC BY 2.0, via Flickr (https://www.flickr.com/photos/81073027@N00/1745978833)</a:t>
-            </a:r>
-            <a:endParaRPr lang="en-US" sz="1800" dirty="0"/>
-          </a:p>
-          <a:p>
-            <a:pPr algn="l" marL="342900" indent="-342900">
-              <a:spcAft>
-                <a:spcPts val="800"/>
-              </a:spcAft>
-              <a:buSzPct val="100000"/>
-              <a:buChar char="•"/>
-            </a:pPr>
-            <a:r>
-              <a:rPr lang="en-US" sz="1800" dirty="0">
-                <a:solidFill>
-                  <a:srgbClr val="111111"/>
-                </a:solidFill>
-                <a:latin typeface="Calibri" pitchFamily="34" charset="0"/>
-                <a:ea typeface="Calibri" pitchFamily="34" charset="-122"/>
-                <a:cs typeface="Calibri" pitchFamily="34" charset="-120"/>
-              </a:rPr>
-              <a:t>Photo, Activity 4: “in the middle of nowhere, morocco” by mariusz kluzniak, CC BY-NC-ND 2.0, via Flickr (https://www.flickr.com/photos/39997856@N03/8398997251)</a:t>
-            </a:r>
-            <a:endParaRPr lang="en-US" sz="1800" dirty="0"/>
-          </a:p>
-          <a:p>
-            <a:pPr algn="l" marL="342900" indent="-342900">
-              <a:spcAft>
-                <a:spcPts val="800"/>
-              </a:spcAft>
-              <a:buSzPct val="100000"/>
-              <a:buChar char="•"/>
-            </a:pPr>
-            <a:r>
-              <a:rPr lang="en-US" sz="1800" dirty="0">
-                <a:solidFill>
-                  <a:srgbClr val="111111"/>
-                </a:solidFill>
-                <a:latin typeface="Calibri" pitchFamily="34" charset="0"/>
-                <a:ea typeface="Calibri" pitchFamily="34" charset="-122"/>
-                <a:cs typeface="Calibri" pitchFamily="34" charset="-120"/>
-              </a:rPr>
-              <a:t>Photo, Activity 5: “Laterite soil bricks in Richard Rebello's farm” by India Water Portal, CC BY-NC-SA 2.0, via Flickr (https://www.flickr.com/photos/21623815@N03/10720461943)</a:t>
-            </a:r>
-            <a:endParaRPr lang="en-US" sz="1800" dirty="0"/>
-          </a:p>
-          <a:p>
-            <a:pPr algn="l" marL="342900" indent="-342900">
-              <a:spcAft>
-                <a:spcPts val="800"/>
-              </a:spcAft>
-              <a:buSzPct val="100000"/>
-              <a:buChar char="•"/>
-            </a:pPr>
-            <a:r>
-              <a:rPr lang="en-US" sz="1800" dirty="0">
-                <a:solidFill>
-                  <a:srgbClr val="111111"/>
-                </a:solidFill>
-                <a:latin typeface="Calibri" pitchFamily="34" charset="0"/>
-                <a:ea typeface="Calibri" pitchFamily="34" charset="-122"/>
-                <a:cs typeface="Calibri" pitchFamily="34" charset="-120"/>
-              </a:rPr>
-              <a:t>Diagrams and animations: drawn for this lesson (Geography Department).</a:t>
-            </a:r>
-            <a:endParaRPr lang="en-US" sz="1800" dirty="0"/>
-          </a:p>
-        </p:txBody>
-      </p:sp>
-      <p:sp>
-        <p:nvSpPr>
-          <p:cNvPr id="25" name="Slide Number Placeholder 0"/>
-          <p:cNvSpPr>
-            <a:spLocks noGrp="1"/>
-          </p:cNvSpPr>
-          <p:nvPr>
-            <p:ph type="sldNum" sz="quarter" idx="4294967295"/>
-          </p:nvPr>
-        </p:nvSpPr>
-        <p:spPr>
-          <a:xfrm>
-            <a:off x="27432" y="91440"/>
-            <a:ext cx="585216" cy="475488"/>
-          </a:xfrm>
-          <a:prstGeom prst="rect">
-            <a:avLst/>
-          </a:prstGeom>
-          <a:extLst>
-            <a:ext uri="{C572A759-6A51-4108-AA02-DFA0A04FC94B}">
-              <ma14:wrappingTextBoxFlag xmlns:ma14="http://schemas.microsoft.com/office/mac/drawingml/2011/main" val="0"/>
-            </a:ext>
-          </a:extLst>
-        </p:spPr>
-        <p:txBody>
-          <a:bodyPr/>
-          <a:lstStyle>
-            <a:lvl1pPr>
-              <a:defRPr sz="2000">
-                <a:solidFill>
-                  <a:srgbClr val="FFFFFF"/>
-                </a:solidFill>
-                <a:latin typeface="Calibri"/>
-                <a:ea typeface="Calibri"/>
-                <a:cs typeface="Calibri"/>
-              </a:defRPr>
-            </a:lvl1pPr>
-          </a:lstStyle>
-          <a:p>
-            <a:pPr algn="ctr"/>
-            <a:fld id="{F7021451-1387-4CA6-816F-3879F97B5CBC}" type="slidenum">
-              <a:rPr b="1" lang="en-US"/>
-              <a:t>53</a:t>
             </a:fld>
             <a:endParaRPr lang="en-US"/>
           </a:p>

--- a/lecons/F2T/02_F2T_L1_P2_Equatorial_Soils_Vegetation.pptx
+++ b/lecons/F2T/02_F2T_L1_P2_Equatorial_Soils_Vegetation.pptx
@@ -3457,7 +3457,7 @@
           <a:p>
             <a:r>
               <a:rPr lang="en-US" dirty="0"/>
-              <a:t>Before we start the new lesson, let us correct the homework I gave you at the end of Lesson 1 (Part 1): The Equatorial Region: Location and Characteristics (Climate). The question was: Ask someone who has lived in Yaoundé, Douala or Bertoua to describe the trees and plants around the town. Write three things he or she says. Take out your exercise books.</a:t>
+              <a:t>Before we start the new lesson, let us correct the homework I gave you at the end of Lesson 1 (Part 1): The Equatorial Region: Location and Characteristics (Climate). The question was: Name the layers of the equatorial forest. Take out your exercise books.</a:t>
             </a:r>
             <a:endParaRPr lang="en-US" dirty="0"/>
           </a:p>
@@ -4073,7 +4073,7 @@
           <a:p>
             <a:r>
               <a:rPr lang="en-US" dirty="0"/>
-              <a:t>For your homework: List three products from the forest of southern Cameroon that are sold in the market of Garoua (for example timber, plantains or cocoa products). We shall correct it at the beginning of our next lesson.</a:t>
+              <a:t>For your homework: Name three resources of the equatorial region. We shall correct it at the beginning of our next lesson.</a:t>
             </a:r>
             <a:endParaRPr lang="en-US" dirty="0"/>
           </a:p>
@@ -4425,7 +4425,7 @@
           <a:p>
             <a:r>
               <a:rPr lang="en-US" dirty="0"/>
-              <a:t>Here is a good answer. Examples: very tall trees growing close together; green leaves all year; many climbing plants; plantains, cocoa and oil palms around the houses. Compare it with your own answer and correct your work in red.</a:t>
+              <a:t>Here is a good answer. Emergents, canopy, under-canopy, shrubs and forest floor. Compare it with your own answer and correct your work in red.</a:t>
             </a:r>
             <a:endParaRPr lang="en-US" dirty="0"/>
           </a:p>
@@ -14999,7 +14999,7 @@
         <p:spPr>
           <a:xfrm>
             <a:off x="0" y="658368"/>
-            <a:ext cx="2468880" cy="5833872"/>
+            <a:ext cx="5120640" cy="5833872"/>
           </a:xfrm>
           <a:prstGeom prst="rect">
             <a:avLst/>
@@ -15014,8 +15014,8 @@
         </p:nvSpPr>
         <p:spPr>
           <a:xfrm>
-            <a:off x="2697480" y="1005840"/>
-            <a:ext cx="9174175" cy="731520"/>
+            <a:off x="5349240" y="1005840"/>
+            <a:ext cx="6522415" cy="731520"/>
           </a:xfrm>
           <a:prstGeom prst="rect">
             <a:avLst/>
@@ -15055,8 +15055,8 @@
         </p:nvSpPr>
         <p:spPr>
           <a:xfrm>
-            <a:off x="2697480" y="1783080"/>
-            <a:ext cx="9174175" cy="4663440"/>
+            <a:off x="5349240" y="1783080"/>
+            <a:ext cx="6522415" cy="4663440"/>
           </a:xfrm>
           <a:prstGeom prst="rect">
             <a:avLst/>
@@ -15103,7 +15103,7 @@
                 <a:ea typeface="Times New Roman" pitchFamily="34" charset="-122"/>
                 <a:cs typeface="Times New Roman" pitchFamily="34" charset="-120"/>
               </a:rPr>
-              <a:t>Ask someone who has lived in Yaoundé, Douala or Bertoua to describe the trees and plants around the town. Write three things he or she says.</a:t>
+              <a:t>Name the layers of the equatorial forest.</a:t>
             </a:r>
             <a:endParaRPr lang="en-US" sz="4000" dirty="0"/>
           </a:p>
@@ -16799,7 +16799,7 @@
                 <a:ea typeface="Times New Roman" pitchFamily="34" charset="-122"/>
                 <a:cs typeface="Times New Roman" pitchFamily="34" charset="-120"/>
               </a:rPr>
-              <a:t>List three products from the forest of southern Cameroon that are sold in the market of Garoua (for example timber, plantains or cocoa products).</a:t>
+              <a:t>Name three resources of the equatorial region.</a:t>
             </a:r>
             <a:endParaRPr lang="en-US" sz="4000" dirty="0"/>
           </a:p>
@@ -19137,7 +19137,7 @@
                 <a:ea typeface="Times New Roman" pitchFamily="34" charset="-122"/>
                 <a:cs typeface="Times New Roman" pitchFamily="34" charset="-120"/>
               </a:rPr>
-              <a:t>Examples: very tall trees growing close together; green leaves all year; many climbing plants; plantains, cocoa and oil palms around the houses.</a:t>
+              <a:t>Emergents, canopy, under-canopy, shrubs and forest floor.</a:t>
             </a:r>
             <a:endParaRPr lang="en-US" sz="4000" dirty="0"/>
           </a:p>
@@ -19682,7 +19682,7 @@
                           <a:ea typeface="Calibri" pitchFamily="34" charset="-122"/>
                           <a:cs typeface="Calibri" pitchFamily="34" charset="-120"/>
                         </a:rPr>
-                        <a:t>List three products from the forest of southern Cameroon that are sold in the market of Garoua (for example timber, plantains or cocoa products).</a:t>
+                        <a:t>Name three resources of the equatorial region.</a:t>
                       </a:r>
                       <a:endParaRPr lang="en-US" sz="1600" dirty="0">
                         <a:latin typeface="Calibri" charset="0"/>
